--- a/paper/figures.pptx
+++ b/paper/figures.pptx
@@ -5,7 +5,7 @@
     <p:sldMasterId id="2147483648" r:id="rId1"/>
   </p:sldMasterIdLst>
   <p:notesMasterIdLst>
-    <p:notesMasterId r:id="rId16"/>
+    <p:notesMasterId r:id="rId17"/>
   </p:notesMasterIdLst>
   <p:sldIdLst>
     <p:sldId id="256" r:id="rId2"/>
@@ -18,10 +18,11 @@
     <p:sldId id="263" r:id="rId9"/>
     <p:sldId id="264" r:id="rId10"/>
     <p:sldId id="266" r:id="rId11"/>
-    <p:sldId id="267" r:id="rId12"/>
-    <p:sldId id="269" r:id="rId13"/>
-    <p:sldId id="265" r:id="rId14"/>
-    <p:sldId id="268" r:id="rId15"/>
+    <p:sldId id="271" r:id="rId12"/>
+    <p:sldId id="267" r:id="rId13"/>
+    <p:sldId id="269" r:id="rId14"/>
+    <p:sldId id="265" r:id="rId15"/>
+    <p:sldId id="268" r:id="rId16"/>
   </p:sldIdLst>
   <p:sldSz cx="12192000" cy="6858000"/>
   <p:notesSz cx="6858000" cy="9144000"/>
@@ -131,7 +132,7 @@
 <file path=ppt/revisionInfo.xml><?xml version="1.0" encoding="utf-8"?>
 <p1510:revInfo xmlns:a="http://schemas.openxmlformats.org/drawingml/2006/main" xmlns:r="http://schemas.openxmlformats.org/officeDocument/2006/relationships" xmlns:p1510="http://schemas.microsoft.com/office/powerpoint/2015/10/main">
   <p1510:revLst>
-    <p1510:client id="{58176077-7511-DA4D-8290-77F28AB65BEC}" v="111" dt="2026-02-15T04:28:16.277"/>
+    <p1510:client id="{77CCF9A6-9404-C14C-B303-F06C2C4D888A}" v="18" dt="2026-05-14T15:56:08.631"/>
   </p1510:revLst>
 </p1510:revInfo>
 </file>
@@ -140,1226 +141,183 @@
 <pc:chgInfo xmlns:a="http://schemas.openxmlformats.org/drawingml/2006/main" xmlns:r="http://schemas.openxmlformats.org/officeDocument/2006/relationships" xmlns:ac="http://schemas.microsoft.com/office/drawing/2013/main/command" xmlns:pc="http://schemas.microsoft.com/office/powerpoint/2013/main/command">
   <pc:docChgLst>
     <pc:chgData name="Kadelka, Claus [MATH]" userId="3587954921_tp_box_2" providerId="OAuth2" clId="{3A5D34D3-13CC-588F-87D8-4157F9E149E9}"/>
-    <pc:docChg chg="undo custSel addSld modSld">
-      <pc:chgData name="Kadelka, Claus [MATH]" userId="3587954921_tp_box_2" providerId="OAuth2" clId="{3A5D34D3-13CC-588F-87D8-4157F9E149E9}" dt="2026-02-15T04:29:40.342" v="3799" actId="1076"/>
+    <pc:docChg chg="undo custSel addSld delSld modSld">
+      <pc:chgData name="Kadelka, Claus [MATH]" userId="3587954921_tp_box_2" providerId="OAuth2" clId="{3A5D34D3-13CC-588F-87D8-4157F9E149E9}" dt="2026-05-14T16:02:42.075" v="5262" actId="115"/>
       <pc:docMkLst>
         <pc:docMk/>
       </pc:docMkLst>
-      <pc:sldChg chg="modSp mod">
-        <pc:chgData name="Kadelka, Claus [MATH]" userId="3587954921_tp_box_2" providerId="OAuth2" clId="{3A5D34D3-13CC-588F-87D8-4157F9E149E9}" dt="2026-02-10T05:59:23.904" v="67"/>
-        <pc:sldMkLst>
-          <pc:docMk/>
-          <pc:sldMk cId="3842302640" sldId="262"/>
-        </pc:sldMkLst>
-        <pc:spChg chg="mod">
-          <ac:chgData name="Kadelka, Claus [MATH]" userId="3587954921_tp_box_2" providerId="OAuth2" clId="{3A5D34D3-13CC-588F-87D8-4157F9E149E9}" dt="2026-02-10T05:55:03.707" v="33" actId="20577"/>
-          <ac:spMkLst>
-            <pc:docMk/>
-            <pc:sldMk cId="3842302640" sldId="262"/>
-            <ac:spMk id="4" creationId="{1DAA9EE6-11C5-A0A4-93B4-2D2087196CC4}"/>
-          </ac:spMkLst>
-        </pc:spChg>
-        <pc:spChg chg="mod">
-          <ac:chgData name="Kadelka, Claus [MATH]" userId="3587954921_tp_box_2" providerId="OAuth2" clId="{3A5D34D3-13CC-588F-87D8-4157F9E149E9}" dt="2026-02-10T05:54:43.476" v="30" actId="20577"/>
-          <ac:spMkLst>
-            <pc:docMk/>
-            <pc:sldMk cId="3842302640" sldId="262"/>
-            <ac:spMk id="5" creationId="{AA2A4C3D-B737-AE2F-71F6-77FDC7733A53}"/>
-          </ac:spMkLst>
-        </pc:spChg>
-        <pc:spChg chg="mod">
-          <ac:chgData name="Kadelka, Claus [MATH]" userId="3587954921_tp_box_2" providerId="OAuth2" clId="{3A5D34D3-13CC-588F-87D8-4157F9E149E9}" dt="2026-02-10T05:59:23.904" v="67"/>
-          <ac:spMkLst>
-            <pc:docMk/>
-            <pc:sldMk cId="3842302640" sldId="262"/>
-            <ac:spMk id="6" creationId="{3F12174E-88D6-19D5-3E11-09A4E62118FD}"/>
-          </ac:spMkLst>
-        </pc:spChg>
-        <pc:spChg chg="mod">
-          <ac:chgData name="Kadelka, Claus [MATH]" userId="3587954921_tp_box_2" providerId="OAuth2" clId="{3A5D34D3-13CC-588F-87D8-4157F9E149E9}" dt="2026-02-10T05:55:28.436" v="38" actId="14100"/>
-          <ac:spMkLst>
-            <pc:docMk/>
-            <pc:sldMk cId="3842302640" sldId="262"/>
-            <ac:spMk id="7" creationId="{8E32BCFE-5A74-DD22-B5A0-DF806E4478F3}"/>
-          </ac:spMkLst>
-        </pc:spChg>
-        <pc:spChg chg="mod">
-          <ac:chgData name="Kadelka, Claus [MATH]" userId="3587954921_tp_box_2" providerId="OAuth2" clId="{3A5D34D3-13CC-588F-87D8-4157F9E149E9}" dt="2026-02-10T05:54:11.731" v="19" actId="20577"/>
-          <ac:spMkLst>
-            <pc:docMk/>
-            <pc:sldMk cId="3842302640" sldId="262"/>
-            <ac:spMk id="8" creationId="{82D1E615-0133-8E7A-494F-891A03D4F713}"/>
-          </ac:spMkLst>
-        </pc:spChg>
-        <pc:spChg chg="mod">
-          <ac:chgData name="Kadelka, Claus [MATH]" userId="3587954921_tp_box_2" providerId="OAuth2" clId="{3A5D34D3-13CC-588F-87D8-4157F9E149E9}" dt="2026-02-10T05:53:59.593" v="14" actId="20577"/>
-          <ac:spMkLst>
-            <pc:docMk/>
-            <pc:sldMk cId="3842302640" sldId="262"/>
-            <ac:spMk id="14" creationId="{64715B86-B7FF-611D-0EC6-4ACE7C5D2932}"/>
-          </ac:spMkLst>
-        </pc:spChg>
-        <pc:spChg chg="mod">
-          <ac:chgData name="Kadelka, Claus [MATH]" userId="3587954921_tp_box_2" providerId="OAuth2" clId="{3A5D34D3-13CC-588F-87D8-4157F9E149E9}" dt="2026-02-10T05:55:35.647" v="40" actId="14100"/>
-          <ac:spMkLst>
-            <pc:docMk/>
-            <pc:sldMk cId="3842302640" sldId="262"/>
-            <ac:spMk id="64" creationId="{C7F4E4D2-E099-F81C-A05E-4DDB135E817C}"/>
-          </ac:spMkLst>
-        </pc:spChg>
-        <pc:cxnChg chg="mod">
-          <ac:chgData name="Kadelka, Claus [MATH]" userId="3587954921_tp_box_2" providerId="OAuth2" clId="{3A5D34D3-13CC-588F-87D8-4157F9E149E9}" dt="2026-02-10T05:54:28.558" v="21" actId="20578"/>
-          <ac:cxnSpMkLst>
-            <pc:docMk/>
-            <pc:sldMk cId="3842302640" sldId="262"/>
-            <ac:cxnSpMk id="11" creationId="{06148DE3-88FE-2E45-57BC-6D81D3479281}"/>
-          </ac:cxnSpMkLst>
-        </pc:cxnChg>
-        <pc:cxnChg chg="mod">
-          <ac:chgData name="Kadelka, Claus [MATH]" userId="3587954921_tp_box_2" providerId="OAuth2" clId="{3A5D34D3-13CC-588F-87D8-4157F9E149E9}" dt="2026-02-10T05:55:28.436" v="38" actId="14100"/>
-          <ac:cxnSpMkLst>
-            <pc:docMk/>
-            <pc:sldMk cId="3842302640" sldId="262"/>
-            <ac:cxnSpMk id="22" creationId="{4943056B-8E7C-22AC-384B-F6BFEC18C1FA}"/>
-          </ac:cxnSpMkLst>
-        </pc:cxnChg>
-        <pc:cxnChg chg="mod">
-          <ac:chgData name="Kadelka, Claus [MATH]" userId="3587954921_tp_box_2" providerId="OAuth2" clId="{3A5D34D3-13CC-588F-87D8-4157F9E149E9}" dt="2026-02-10T05:59:23.904" v="67"/>
-          <ac:cxnSpMkLst>
-            <pc:docMk/>
-            <pc:sldMk cId="3842302640" sldId="262"/>
-            <ac:cxnSpMk id="25" creationId="{3800CD7F-F1D7-D141-A669-1C1E7121E604}"/>
-          </ac:cxnSpMkLst>
-        </pc:cxnChg>
-        <pc:cxnChg chg="mod">
-          <ac:chgData name="Kadelka, Claus [MATH]" userId="3587954921_tp_box_2" providerId="OAuth2" clId="{3A5D34D3-13CC-588F-87D8-4157F9E149E9}" dt="2026-02-10T05:54:28.558" v="21" actId="20578"/>
-          <ac:cxnSpMkLst>
-            <pc:docMk/>
-            <pc:sldMk cId="3842302640" sldId="262"/>
-            <ac:cxnSpMk id="30" creationId="{B4D7F1A8-D56F-696A-F251-AB5438B83349}"/>
-          </ac:cxnSpMkLst>
-        </pc:cxnChg>
-      </pc:sldChg>
-      <pc:sldChg chg="modSp add mod">
-        <pc:chgData name="Kadelka, Claus [MATH]" userId="3587954921_tp_box_2" providerId="OAuth2" clId="{3A5D34D3-13CC-588F-87D8-4157F9E149E9}" dt="2026-02-13T15:57:59.965" v="545" actId="15"/>
-        <pc:sldMkLst>
-          <pc:docMk/>
-          <pc:sldMk cId="3918560306" sldId="263"/>
-        </pc:sldMkLst>
-        <pc:spChg chg="mod">
-          <ac:chgData name="Kadelka, Claus [MATH]" userId="3587954921_tp_box_2" providerId="OAuth2" clId="{3A5D34D3-13CC-588F-87D8-4157F9E149E9}" dt="2026-02-13T15:53:13.497" v="513" actId="20577"/>
-          <ac:spMkLst>
-            <pc:docMk/>
-            <pc:sldMk cId="3918560306" sldId="263"/>
-            <ac:spMk id="4" creationId="{BDC52EDB-2031-7665-3923-E5B5993B1B7A}"/>
-          </ac:spMkLst>
-        </pc:spChg>
-        <pc:spChg chg="mod">
-          <ac:chgData name="Kadelka, Claus [MATH]" userId="3587954921_tp_box_2" providerId="OAuth2" clId="{3A5D34D3-13CC-588F-87D8-4157F9E149E9}" dt="2026-02-13T15:52:19.945" v="477" actId="14100"/>
-          <ac:spMkLst>
-            <pc:docMk/>
-            <pc:sldMk cId="3918560306" sldId="263"/>
-            <ac:spMk id="5" creationId="{7B0391BC-A567-4AA6-B146-24F684DC7C4B}"/>
-          </ac:spMkLst>
-        </pc:spChg>
-        <pc:spChg chg="mod">
-          <ac:chgData name="Kadelka, Claus [MATH]" userId="3587954921_tp_box_2" providerId="OAuth2" clId="{3A5D34D3-13CC-588F-87D8-4157F9E149E9}" dt="2026-02-13T15:54:15.372" v="544" actId="20577"/>
-          <ac:spMkLst>
-            <pc:docMk/>
-            <pc:sldMk cId="3918560306" sldId="263"/>
-            <ac:spMk id="6" creationId="{785A3C15-DA6E-0030-3CA8-281CD248ECEE}"/>
-          </ac:spMkLst>
-        </pc:spChg>
-        <pc:spChg chg="mod">
-          <ac:chgData name="Kadelka, Claus [MATH]" userId="3587954921_tp_box_2" providerId="OAuth2" clId="{3A5D34D3-13CC-588F-87D8-4157F9E149E9}" dt="2026-02-13T15:57:59.965" v="545" actId="15"/>
-          <ac:spMkLst>
-            <pc:docMk/>
-            <pc:sldMk cId="3918560306" sldId="263"/>
-            <ac:spMk id="7" creationId="{5DCA17D7-E1C9-6887-5A39-5E13A8559D88}"/>
-          </ac:spMkLst>
-        </pc:spChg>
-        <pc:spChg chg="mod">
-          <ac:chgData name="Kadelka, Claus [MATH]" userId="3587954921_tp_box_2" providerId="OAuth2" clId="{3A5D34D3-13CC-588F-87D8-4157F9E149E9}" dt="2026-02-13T15:53:38.794" v="516" actId="1076"/>
-          <ac:spMkLst>
-            <pc:docMk/>
-            <pc:sldMk cId="3918560306" sldId="263"/>
-            <ac:spMk id="8" creationId="{92DE0923-6F4C-9C47-EB15-6B708E8D13B7}"/>
-          </ac:spMkLst>
-        </pc:spChg>
-        <pc:cxnChg chg="mod">
-          <ac:chgData name="Kadelka, Claus [MATH]" userId="3587954921_tp_box_2" providerId="OAuth2" clId="{3A5D34D3-13CC-588F-87D8-4157F9E149E9}" dt="2026-02-13T15:52:19.945" v="477" actId="14100"/>
-          <ac:cxnSpMkLst>
-            <pc:docMk/>
-            <pc:sldMk cId="3918560306" sldId="263"/>
-            <ac:cxnSpMk id="11" creationId="{AF089599-FBE1-9120-0B48-5B67E543806C}"/>
-          </ac:cxnSpMkLst>
-        </pc:cxnChg>
-        <pc:cxnChg chg="mod">
-          <ac:chgData name="Kadelka, Claus [MATH]" userId="3587954921_tp_box_2" providerId="OAuth2" clId="{3A5D34D3-13CC-588F-87D8-4157F9E149E9}" dt="2026-02-13T15:57:59.965" v="545" actId="15"/>
-          <ac:cxnSpMkLst>
-            <pc:docMk/>
-            <pc:sldMk cId="3918560306" sldId="263"/>
-            <ac:cxnSpMk id="22" creationId="{C92BEAD4-AB3F-F6AD-6CDA-BED74B79A387}"/>
-          </ac:cxnSpMkLst>
-        </pc:cxnChg>
-        <pc:cxnChg chg="mod">
-          <ac:chgData name="Kadelka, Claus [MATH]" userId="3587954921_tp_box_2" providerId="OAuth2" clId="{3A5D34D3-13CC-588F-87D8-4157F9E149E9}" dt="2026-02-13T15:54:06.473" v="539" actId="20577"/>
-          <ac:cxnSpMkLst>
-            <pc:docMk/>
-            <pc:sldMk cId="3918560306" sldId="263"/>
-            <ac:cxnSpMk id="25" creationId="{5EDDB56A-C114-C385-569F-409B01C198DC}"/>
-          </ac:cxnSpMkLst>
-        </pc:cxnChg>
-        <pc:cxnChg chg="mod">
-          <ac:chgData name="Kadelka, Claus [MATH]" userId="3587954921_tp_box_2" providerId="OAuth2" clId="{3A5D34D3-13CC-588F-87D8-4157F9E149E9}" dt="2026-02-13T15:52:14.586" v="476" actId="14100"/>
-          <ac:cxnSpMkLst>
-            <pc:docMk/>
-            <pc:sldMk cId="3918560306" sldId="263"/>
-            <ac:cxnSpMk id="27" creationId="{BBF53E0A-B02D-112A-A7D2-4396469776D2}"/>
-          </ac:cxnSpMkLst>
-        </pc:cxnChg>
-        <pc:cxnChg chg="mod">
-          <ac:chgData name="Kadelka, Claus [MATH]" userId="3587954921_tp_box_2" providerId="OAuth2" clId="{3A5D34D3-13CC-588F-87D8-4157F9E149E9}" dt="2026-02-13T15:52:19.945" v="477" actId="14100"/>
-          <ac:cxnSpMkLst>
-            <pc:docMk/>
-            <pc:sldMk cId="3918560306" sldId="263"/>
-            <ac:cxnSpMk id="30" creationId="{5B489A06-47F0-6FF0-18B3-04BCBBF9F369}"/>
-          </ac:cxnSpMkLst>
-        </pc:cxnChg>
-      </pc:sldChg>
-      <pc:sldChg chg="addSp delSp modSp add mod">
-        <pc:chgData name="Kadelka, Claus [MATH]" userId="3587954921_tp_box_2" providerId="OAuth2" clId="{3A5D34D3-13CC-588F-87D8-4157F9E149E9}" dt="2026-02-14T04:26:58.922" v="2286" actId="1076"/>
-        <pc:sldMkLst>
-          <pc:docMk/>
-          <pc:sldMk cId="1824653240" sldId="264"/>
-        </pc:sldMkLst>
-        <pc:spChg chg="add mod">
-          <ac:chgData name="Kadelka, Claus [MATH]" userId="3587954921_tp_box_2" providerId="OAuth2" clId="{3A5D34D3-13CC-588F-87D8-4157F9E149E9}" dt="2026-02-14T04:23:23.725" v="2273" actId="1076"/>
-          <ac:spMkLst>
-            <pc:docMk/>
-            <pc:sldMk cId="1824653240" sldId="264"/>
-            <ac:spMk id="2" creationId="{BBEF3BA4-62FE-10A2-F798-432A682F68A0}"/>
-          </ac:spMkLst>
-        </pc:spChg>
-        <pc:spChg chg="del">
-          <ac:chgData name="Kadelka, Claus [MATH]" userId="3587954921_tp_box_2" providerId="OAuth2" clId="{3A5D34D3-13CC-588F-87D8-4157F9E149E9}" dt="2026-02-14T00:39:31.197" v="843" actId="478"/>
-          <ac:spMkLst>
-            <pc:docMk/>
-            <pc:sldMk cId="1824653240" sldId="264"/>
-            <ac:spMk id="3" creationId="{795B80F1-D9E0-8617-5C32-65544A6D8B73}"/>
-          </ac:spMkLst>
-        </pc:spChg>
-        <pc:spChg chg="del">
-          <ac:chgData name="Kadelka, Claus [MATH]" userId="3587954921_tp_box_2" providerId="OAuth2" clId="{3A5D34D3-13CC-588F-87D8-4157F9E149E9}" dt="2026-02-14T00:39:31.197" v="843" actId="478"/>
-          <ac:spMkLst>
-            <pc:docMk/>
-            <pc:sldMk cId="1824653240" sldId="264"/>
-            <ac:spMk id="4" creationId="{0369CE56-7B43-38DB-A4D7-2CC68BD4AF2F}"/>
-          </ac:spMkLst>
-        </pc:spChg>
-        <pc:spChg chg="del">
-          <ac:chgData name="Kadelka, Claus [MATH]" userId="3587954921_tp_box_2" providerId="OAuth2" clId="{3A5D34D3-13CC-588F-87D8-4157F9E149E9}" dt="2026-02-14T00:39:31.197" v="843" actId="478"/>
-          <ac:spMkLst>
-            <pc:docMk/>
-            <pc:sldMk cId="1824653240" sldId="264"/>
-            <ac:spMk id="5" creationId="{EDBEDA5E-92FC-4ED3-B196-392579CE3D88}"/>
-          </ac:spMkLst>
-        </pc:spChg>
-        <pc:spChg chg="del">
-          <ac:chgData name="Kadelka, Claus [MATH]" userId="3587954921_tp_box_2" providerId="OAuth2" clId="{3A5D34D3-13CC-588F-87D8-4157F9E149E9}" dt="2026-02-14T00:39:31.197" v="843" actId="478"/>
-          <ac:spMkLst>
-            <pc:docMk/>
-            <pc:sldMk cId="1824653240" sldId="264"/>
-            <ac:spMk id="6" creationId="{073F7244-04F4-800D-28DE-68B66325DF9D}"/>
-          </ac:spMkLst>
-        </pc:spChg>
-        <pc:spChg chg="del">
-          <ac:chgData name="Kadelka, Claus [MATH]" userId="3587954921_tp_box_2" providerId="OAuth2" clId="{3A5D34D3-13CC-588F-87D8-4157F9E149E9}" dt="2026-02-14T00:39:31.197" v="843" actId="478"/>
-          <ac:spMkLst>
-            <pc:docMk/>
-            <pc:sldMk cId="1824653240" sldId="264"/>
-            <ac:spMk id="7" creationId="{24FE043E-DFBC-160A-7040-D5B8CD3BEC3C}"/>
-          </ac:spMkLst>
-        </pc:spChg>
-        <pc:spChg chg="del">
-          <ac:chgData name="Kadelka, Claus [MATH]" userId="3587954921_tp_box_2" providerId="OAuth2" clId="{3A5D34D3-13CC-588F-87D8-4157F9E149E9}" dt="2026-02-14T00:39:31.197" v="843" actId="478"/>
-          <ac:spMkLst>
-            <pc:docMk/>
-            <pc:sldMk cId="1824653240" sldId="264"/>
-            <ac:spMk id="8" creationId="{BF352D68-4734-1AC7-EF41-5FF1ED52B734}"/>
-          </ac:spMkLst>
-        </pc:spChg>
-        <pc:spChg chg="del">
-          <ac:chgData name="Kadelka, Claus [MATH]" userId="3587954921_tp_box_2" providerId="OAuth2" clId="{3A5D34D3-13CC-588F-87D8-4157F9E149E9}" dt="2026-02-14T00:39:31.197" v="843" actId="478"/>
-          <ac:spMkLst>
-            <pc:docMk/>
-            <pc:sldMk cId="1824653240" sldId="264"/>
-            <ac:spMk id="9" creationId="{E2B8648D-EE53-7ABF-C3D6-83E81490D0DF}"/>
-          </ac:spMkLst>
-        </pc:spChg>
-        <pc:spChg chg="del">
-          <ac:chgData name="Kadelka, Claus [MATH]" userId="3587954921_tp_box_2" providerId="OAuth2" clId="{3A5D34D3-13CC-588F-87D8-4157F9E149E9}" dt="2026-02-14T00:39:31.197" v="843" actId="478"/>
-          <ac:spMkLst>
-            <pc:docMk/>
-            <pc:sldMk cId="1824653240" sldId="264"/>
-            <ac:spMk id="10" creationId="{3EDE5DB8-D1DE-5625-9952-54C8436DF443}"/>
-          </ac:spMkLst>
-        </pc:spChg>
-        <pc:spChg chg="del">
-          <ac:chgData name="Kadelka, Claus [MATH]" userId="3587954921_tp_box_2" providerId="OAuth2" clId="{3A5D34D3-13CC-588F-87D8-4157F9E149E9}" dt="2026-02-14T00:39:31.197" v="843" actId="478"/>
-          <ac:spMkLst>
-            <pc:docMk/>
-            <pc:sldMk cId="1824653240" sldId="264"/>
-            <ac:spMk id="14" creationId="{2C14E69B-95C9-B191-43C8-A733B2A30931}"/>
-          </ac:spMkLst>
-        </pc:spChg>
-        <pc:spChg chg="add mod">
-          <ac:chgData name="Kadelka, Claus [MATH]" userId="3587954921_tp_box_2" providerId="OAuth2" clId="{3A5D34D3-13CC-588F-87D8-4157F9E149E9}" dt="2026-02-14T04:26:58.922" v="2286" actId="1076"/>
-          <ac:spMkLst>
-            <pc:docMk/>
-            <pc:sldMk cId="1824653240" sldId="264"/>
-            <ac:spMk id="17" creationId="{A6DFA139-0033-1D87-5965-1612A7046E0A}"/>
-          </ac:spMkLst>
-        </pc:spChg>
-        <pc:spChg chg="add mod">
-          <ac:chgData name="Kadelka, Claus [MATH]" userId="3587954921_tp_box_2" providerId="OAuth2" clId="{3A5D34D3-13CC-588F-87D8-4157F9E149E9}" dt="2026-02-14T04:23:18.768" v="2271" actId="14100"/>
-          <ac:spMkLst>
-            <pc:docMk/>
-            <pc:sldMk cId="1824653240" sldId="264"/>
-            <ac:spMk id="18" creationId="{AAE02E2B-C70B-A642-1E2A-F43C49D2DC31}"/>
-          </ac:spMkLst>
-        </pc:spChg>
-        <pc:spChg chg="add mod">
-          <ac:chgData name="Kadelka, Claus [MATH]" userId="3587954921_tp_box_2" providerId="OAuth2" clId="{3A5D34D3-13CC-588F-87D8-4157F9E149E9}" dt="2026-02-14T04:23:21.530" v="2272" actId="1076"/>
-          <ac:spMkLst>
-            <pc:docMk/>
-            <pc:sldMk cId="1824653240" sldId="264"/>
-            <ac:spMk id="19" creationId="{B127E6E4-2E41-6DC0-D66A-4CF32E7E8EBA}"/>
-          </ac:spMkLst>
-        </pc:spChg>
-        <pc:spChg chg="del">
-          <ac:chgData name="Kadelka, Claus [MATH]" userId="3587954921_tp_box_2" providerId="OAuth2" clId="{3A5D34D3-13CC-588F-87D8-4157F9E149E9}" dt="2026-02-14T00:39:31.197" v="843" actId="478"/>
-          <ac:spMkLst>
-            <pc:docMk/>
-            <pc:sldMk cId="1824653240" sldId="264"/>
-            <ac:spMk id="64" creationId="{DAE05BDB-37EF-1776-CE64-E37C4D5AB336}"/>
-          </ac:spMkLst>
-        </pc:spChg>
-        <pc:cxnChg chg="add mod">
-          <ac:chgData name="Kadelka, Claus [MATH]" userId="3587954921_tp_box_2" providerId="OAuth2" clId="{3A5D34D3-13CC-588F-87D8-4157F9E149E9}" dt="2026-02-14T04:26:58.922" v="2286" actId="1076"/>
-          <ac:cxnSpMkLst>
-            <pc:docMk/>
-            <pc:sldMk cId="1824653240" sldId="264"/>
-            <ac:cxnSpMk id="20" creationId="{4BE494B3-1C38-AE25-9A12-52B1E330AB0A}"/>
-          </ac:cxnSpMkLst>
-        </pc:cxnChg>
-        <pc:cxnChg chg="add mod">
-          <ac:chgData name="Kadelka, Claus [MATH]" userId="3587954921_tp_box_2" providerId="OAuth2" clId="{3A5D34D3-13CC-588F-87D8-4157F9E149E9}" dt="2026-02-14T04:26:58.922" v="2286" actId="1076"/>
-          <ac:cxnSpMkLst>
-            <pc:docMk/>
-            <pc:sldMk cId="1824653240" sldId="264"/>
-            <ac:cxnSpMk id="24" creationId="{77604F8A-E310-3EFD-9412-5D29BE5284C8}"/>
-          </ac:cxnSpMkLst>
-        </pc:cxnChg>
-        <pc:cxnChg chg="add mod">
-          <ac:chgData name="Kadelka, Claus [MATH]" userId="3587954921_tp_box_2" providerId="OAuth2" clId="{3A5D34D3-13CC-588F-87D8-4157F9E149E9}" dt="2026-02-14T04:23:45.196" v="2282" actId="14100"/>
-          <ac:cxnSpMkLst>
-            <pc:docMk/>
-            <pc:sldMk cId="1824653240" sldId="264"/>
-            <ac:cxnSpMk id="29" creationId="{C14D94DD-3A07-3830-6ECC-67BD852BF7C0}"/>
-          </ac:cxnSpMkLst>
-        </pc:cxnChg>
-      </pc:sldChg>
-      <pc:sldChg chg="addSp delSp modSp add mod">
-        <pc:chgData name="Kadelka, Claus [MATH]" userId="3587954921_tp_box_2" providerId="OAuth2" clId="{3A5D34D3-13CC-588F-87D8-4157F9E149E9}" dt="2026-02-14T00:54:45.748" v="1643" actId="1076"/>
-        <pc:sldMkLst>
-          <pc:docMk/>
-          <pc:sldMk cId="401518677" sldId="265"/>
-        </pc:sldMkLst>
-        <pc:spChg chg="del">
-          <ac:chgData name="Kadelka, Claus [MATH]" userId="3587954921_tp_box_2" providerId="OAuth2" clId="{3A5D34D3-13CC-588F-87D8-4157F9E149E9}" dt="2026-02-14T00:48:43.305" v="1147" actId="478"/>
-          <ac:spMkLst>
-            <pc:docMk/>
-            <pc:sldMk cId="401518677" sldId="265"/>
-            <ac:spMk id="2" creationId="{CC96EF0D-8062-09D2-6C46-15854902BB21}"/>
-          </ac:spMkLst>
-        </pc:spChg>
-        <pc:spChg chg="add mod">
-          <ac:chgData name="Kadelka, Claus [MATH]" userId="3587954921_tp_box_2" providerId="OAuth2" clId="{3A5D34D3-13CC-588F-87D8-4157F9E149E9}" dt="2026-02-14T00:49:24.445" v="1229" actId="20577"/>
-          <ac:spMkLst>
-            <pc:docMk/>
-            <pc:sldMk cId="401518677" sldId="265"/>
-            <ac:spMk id="3" creationId="{60F3A772-A2C7-01E5-95CF-B6FC792A1454}"/>
-          </ac:spMkLst>
-        </pc:spChg>
-        <pc:spChg chg="add mod">
-          <ac:chgData name="Kadelka, Claus [MATH]" userId="3587954921_tp_box_2" providerId="OAuth2" clId="{3A5D34D3-13CC-588F-87D8-4157F9E149E9}" dt="2026-02-14T00:50:00.489" v="1281" actId="1076"/>
-          <ac:spMkLst>
-            <pc:docMk/>
-            <pc:sldMk cId="401518677" sldId="265"/>
-            <ac:spMk id="4" creationId="{7FBAC9DB-401B-87D0-D304-E9CD4FFEA054}"/>
-          </ac:spMkLst>
-        </pc:spChg>
-        <pc:spChg chg="add del mod">
-          <ac:chgData name="Kadelka, Claus [MATH]" userId="3587954921_tp_box_2" providerId="OAuth2" clId="{3A5D34D3-13CC-588F-87D8-4157F9E149E9}" dt="2026-02-14T00:50:24.665" v="1367"/>
-          <ac:spMkLst>
-            <pc:docMk/>
-            <pc:sldMk cId="401518677" sldId="265"/>
-            <ac:spMk id="5" creationId="{A3A3B4C3-321A-E097-90F7-1534C82FFFBF}"/>
-          </ac:spMkLst>
-        </pc:spChg>
-        <pc:spChg chg="add mod">
-          <ac:chgData name="Kadelka, Claus [MATH]" userId="3587954921_tp_box_2" providerId="OAuth2" clId="{3A5D34D3-13CC-588F-87D8-4157F9E149E9}" dt="2026-02-14T00:54:45.748" v="1643" actId="1076"/>
-          <ac:spMkLst>
-            <pc:docMk/>
-            <pc:sldMk cId="401518677" sldId="265"/>
-            <ac:spMk id="6" creationId="{6E2F1E61-07CB-A9B6-192C-5D856BEB279B}"/>
-          </ac:spMkLst>
-        </pc:spChg>
-        <pc:spChg chg="add mod">
-          <ac:chgData name="Kadelka, Claus [MATH]" userId="3587954921_tp_box_2" providerId="OAuth2" clId="{3A5D34D3-13CC-588F-87D8-4157F9E149E9}" dt="2026-02-14T00:54:29.905" v="1642" actId="1076"/>
-          <ac:spMkLst>
-            <pc:docMk/>
-            <pc:sldMk cId="401518677" sldId="265"/>
-            <ac:spMk id="7" creationId="{B109F9C5-CD3C-6F8D-4102-05DBE9D49E80}"/>
-          </ac:spMkLst>
-        </pc:spChg>
-        <pc:spChg chg="add mod">
-          <ac:chgData name="Kadelka, Claus [MATH]" userId="3587954921_tp_box_2" providerId="OAuth2" clId="{3A5D34D3-13CC-588F-87D8-4157F9E149E9}" dt="2026-02-14T00:51:20.326" v="1559" actId="313"/>
-          <ac:spMkLst>
-            <pc:docMk/>
-            <pc:sldMk cId="401518677" sldId="265"/>
-            <ac:spMk id="8" creationId="{9D6A2D28-B59E-CB79-79A4-5C7011DBAB95}"/>
-          </ac:spMkLst>
-        </pc:spChg>
-        <pc:spChg chg="add mod">
-          <ac:chgData name="Kadelka, Claus [MATH]" userId="3587954921_tp_box_2" providerId="OAuth2" clId="{3A5D34D3-13CC-588F-87D8-4157F9E149E9}" dt="2026-02-14T00:53:36.040" v="1625" actId="20577"/>
-          <ac:spMkLst>
-            <pc:docMk/>
-            <pc:sldMk cId="401518677" sldId="265"/>
-            <ac:spMk id="9" creationId="{78D4F520-DE3C-2AC9-ED94-3684C37AF8C5}"/>
-          </ac:spMkLst>
-        </pc:spChg>
-        <pc:spChg chg="del">
-          <ac:chgData name="Kadelka, Claus [MATH]" userId="3587954921_tp_box_2" providerId="OAuth2" clId="{3A5D34D3-13CC-588F-87D8-4157F9E149E9}" dt="2026-02-14T00:48:43.305" v="1147" actId="478"/>
-          <ac:spMkLst>
-            <pc:docMk/>
-            <pc:sldMk cId="401518677" sldId="265"/>
-            <ac:spMk id="17" creationId="{7E5A23D6-23E8-F156-6427-CA580CFAE4AE}"/>
-          </ac:spMkLst>
-        </pc:spChg>
-        <pc:spChg chg="del">
-          <ac:chgData name="Kadelka, Claus [MATH]" userId="3587954921_tp_box_2" providerId="OAuth2" clId="{3A5D34D3-13CC-588F-87D8-4157F9E149E9}" dt="2026-02-14T00:48:43.305" v="1147" actId="478"/>
-          <ac:spMkLst>
-            <pc:docMk/>
-            <pc:sldMk cId="401518677" sldId="265"/>
-            <ac:spMk id="18" creationId="{3596E652-90A2-6331-A523-6D57A371B131}"/>
-          </ac:spMkLst>
-        </pc:spChg>
-        <pc:spChg chg="del">
-          <ac:chgData name="Kadelka, Claus [MATH]" userId="3587954921_tp_box_2" providerId="OAuth2" clId="{3A5D34D3-13CC-588F-87D8-4157F9E149E9}" dt="2026-02-14T00:48:43.305" v="1147" actId="478"/>
-          <ac:spMkLst>
-            <pc:docMk/>
-            <pc:sldMk cId="401518677" sldId="265"/>
-            <ac:spMk id="19" creationId="{E1EBFB5E-9B87-29E7-6C71-6FD35043B38C}"/>
-          </ac:spMkLst>
-        </pc:spChg>
-      </pc:sldChg>
-      <pc:sldChg chg="modSp add mod">
-        <pc:chgData name="Kadelka, Claus [MATH]" userId="3587954921_tp_box_2" providerId="OAuth2" clId="{3A5D34D3-13CC-588F-87D8-4157F9E149E9}" dt="2026-02-14T04:51:37.615" v="2683" actId="114"/>
+      <pc:sldChg chg="modNotesTx">
+        <pc:chgData name="Kadelka, Claus [MATH]" userId="3587954921_tp_box_2" providerId="OAuth2" clId="{3A5D34D3-13CC-588F-87D8-4157F9E149E9}" dt="2026-05-14T15:15:13.411" v="3948" actId="20577"/>
         <pc:sldMkLst>
           <pc:docMk/>
           <pc:sldMk cId="1259902216" sldId="266"/>
         </pc:sldMkLst>
+      </pc:sldChg>
+      <pc:sldChg chg="modSp add del mod">
+        <pc:chgData name="Kadelka, Claus [MATH]" userId="3587954921_tp_box_2" providerId="OAuth2" clId="{3A5D34D3-13CC-588F-87D8-4157F9E149E9}" dt="2026-05-14T15:15:00.556" v="3913" actId="2696"/>
+        <pc:sldMkLst>
+          <pc:docMk/>
+          <pc:sldMk cId="2410410772" sldId="270"/>
+        </pc:sldMkLst>
         <pc:spChg chg="mod">
-          <ac:chgData name="Kadelka, Claus [MATH]" userId="3587954921_tp_box_2" providerId="OAuth2" clId="{3A5D34D3-13CC-588F-87D8-4157F9E149E9}" dt="2026-02-14T04:49:35.384" v="2668" actId="14100"/>
+          <ac:chgData name="Kadelka, Claus [MATH]" userId="3587954921_tp_box_2" providerId="OAuth2" clId="{3A5D34D3-13CC-588F-87D8-4157F9E149E9}" dt="2026-05-14T15:03:11.342" v="3911" actId="115"/>
           <ac:spMkLst>
             <pc:docMk/>
-            <pc:sldMk cId="1259902216" sldId="266"/>
-            <ac:spMk id="2" creationId="{36D0AC01-FE54-4085-1975-447DEA318C94}"/>
+            <pc:sldMk cId="2410410772" sldId="270"/>
+            <ac:spMk id="17" creationId="{F534D601-0294-63F7-FDAA-09C6BA5F44F4}"/>
           </ac:spMkLst>
         </pc:spChg>
         <pc:spChg chg="mod">
-          <ac:chgData name="Kadelka, Claus [MATH]" userId="3587954921_tp_box_2" providerId="OAuth2" clId="{3A5D34D3-13CC-588F-87D8-4157F9E149E9}" dt="2026-02-14T04:51:37.615" v="2683" actId="114"/>
+          <ac:chgData name="Kadelka, Claus [MATH]" userId="3587954921_tp_box_2" providerId="OAuth2" clId="{3A5D34D3-13CC-588F-87D8-4157F9E149E9}" dt="2026-05-14T15:02:10.321" v="3908" actId="20577"/>
           <ac:spMkLst>
             <pc:docMk/>
-            <pc:sldMk cId="1259902216" sldId="266"/>
-            <ac:spMk id="17" creationId="{DCE35789-5F2F-7726-7B85-FDB12FE10BE2}"/>
+            <pc:sldMk cId="2410410772" sldId="270"/>
+            <ac:spMk id="18" creationId="{CCACBEF7-EFD2-B602-7A67-D9AC080AB99C}"/>
           </ac:spMkLst>
         </pc:spChg>
         <pc:spChg chg="mod">
-          <ac:chgData name="Kadelka, Claus [MATH]" userId="3587954921_tp_box_2" providerId="OAuth2" clId="{3A5D34D3-13CC-588F-87D8-4157F9E149E9}" dt="2026-02-14T04:36:25.409" v="2549" actId="207"/>
+          <ac:chgData name="Kadelka, Claus [MATH]" userId="3587954921_tp_box_2" providerId="OAuth2" clId="{3A5D34D3-13CC-588F-87D8-4157F9E149E9}" dt="2026-05-14T15:02:35.839" v="3909" actId="1076"/>
           <ac:spMkLst>
             <pc:docMk/>
-            <pc:sldMk cId="1259902216" sldId="266"/>
-            <ac:spMk id="18" creationId="{FCE41792-2E31-D344-F837-D9E5F1917539}"/>
+            <pc:sldMk cId="2410410772" sldId="270"/>
+            <ac:spMk id="19" creationId="{27B29B3B-DC44-A894-362C-D8AB2EBBC617}"/>
+          </ac:spMkLst>
+        </pc:spChg>
+        <pc:cxnChg chg="mod">
+          <ac:chgData name="Kadelka, Claus [MATH]" userId="3587954921_tp_box_2" providerId="OAuth2" clId="{3A5D34D3-13CC-588F-87D8-4157F9E149E9}" dt="2026-05-14T15:00:37.609" v="3814" actId="20577"/>
+          <ac:cxnSpMkLst>
+            <pc:docMk/>
+            <pc:sldMk cId="2410410772" sldId="270"/>
+            <ac:cxnSpMk id="24" creationId="{BEAAA0AB-18BD-33C9-06D1-7E7014E2116A}"/>
+          </ac:cxnSpMkLst>
+        </pc:cxnChg>
+        <pc:cxnChg chg="mod">
+          <ac:chgData name="Kadelka, Claus [MATH]" userId="3587954921_tp_box_2" providerId="OAuth2" clId="{3A5D34D3-13CC-588F-87D8-4157F9E149E9}" dt="2026-05-14T15:00:37.609" v="3814" actId="20577"/>
+          <ac:cxnSpMkLst>
+            <pc:docMk/>
+            <pc:sldMk cId="2410410772" sldId="270"/>
+            <ac:cxnSpMk id="29" creationId="{0F4F8E4B-124D-CD62-9718-74E225AC9C69}"/>
+          </ac:cxnSpMkLst>
+        </pc:cxnChg>
+      </pc:sldChg>
+      <pc:sldChg chg="addSp delSp modSp add mod modNotesTx">
+        <pc:chgData name="Kadelka, Claus [MATH]" userId="3587954921_tp_box_2" providerId="OAuth2" clId="{3A5D34D3-13CC-588F-87D8-4157F9E149E9}" dt="2026-05-14T16:02:42.075" v="5262" actId="115"/>
+        <pc:sldMkLst>
+          <pc:docMk/>
+          <pc:sldMk cId="2913835367" sldId="271"/>
+        </pc:sldMkLst>
+        <pc:spChg chg="mod">
+          <ac:chgData name="Kadelka, Claus [MATH]" userId="3587954921_tp_box_2" providerId="OAuth2" clId="{3A5D34D3-13CC-588F-87D8-4157F9E149E9}" dt="2026-05-14T16:02:35.355" v="5259" actId="115"/>
+          <ac:spMkLst>
+            <pc:docMk/>
+            <pc:sldMk cId="2913835367" sldId="271"/>
+            <ac:spMk id="2" creationId="{FC30D08E-44AE-D0A2-1AF4-8A2281AA45A1}"/>
+          </ac:spMkLst>
+        </pc:spChg>
+        <pc:spChg chg="add del mod">
+          <ac:chgData name="Kadelka, Claus [MATH]" userId="3587954921_tp_box_2" providerId="OAuth2" clId="{3A5D34D3-13CC-588F-87D8-4157F9E149E9}" dt="2026-05-14T15:25:27.522" v="4426" actId="478"/>
+          <ac:spMkLst>
+            <pc:docMk/>
+            <pc:sldMk cId="2913835367" sldId="271"/>
+            <ac:spMk id="3" creationId="{CE019D2E-665A-2D1B-3438-DDCC40A8D8F6}"/>
+          </ac:spMkLst>
+        </pc:spChg>
+        <pc:spChg chg="add del mod">
+          <ac:chgData name="Kadelka, Claus [MATH]" userId="3587954921_tp_box_2" providerId="OAuth2" clId="{3A5D34D3-13CC-588F-87D8-4157F9E149E9}" dt="2026-05-14T15:25:29.424" v="4427" actId="478"/>
+          <ac:spMkLst>
+            <pc:docMk/>
+            <pc:sldMk cId="2913835367" sldId="271"/>
+            <ac:spMk id="5" creationId="{127B1F48-1A14-FFAA-7B9D-BA465B86EDFD}"/>
+          </ac:spMkLst>
+        </pc:spChg>
+        <pc:spChg chg="add del mod">
+          <ac:chgData name="Kadelka, Claus [MATH]" userId="3587954921_tp_box_2" providerId="OAuth2" clId="{3A5D34D3-13CC-588F-87D8-4157F9E149E9}" dt="2026-05-14T15:38:21.645" v="4705" actId="478"/>
+          <ac:spMkLst>
+            <pc:docMk/>
+            <pc:sldMk cId="2913835367" sldId="271"/>
+            <ac:spMk id="10" creationId="{4AF59EAA-708D-6A52-C68C-C20D8A68E056}"/>
+          </ac:spMkLst>
+        </pc:spChg>
+        <pc:spChg chg="add del mod">
+          <ac:chgData name="Kadelka, Claus [MATH]" userId="3587954921_tp_box_2" providerId="OAuth2" clId="{3A5D34D3-13CC-588F-87D8-4157F9E149E9}" dt="2026-05-14T15:44:07.192" v="4939" actId="478"/>
+          <ac:spMkLst>
+            <pc:docMk/>
+            <pc:sldMk cId="2913835367" sldId="271"/>
+            <ac:spMk id="16" creationId="{A8C87325-C84B-D05C-FE5B-7A87EDB2161E}"/>
           </ac:spMkLst>
         </pc:spChg>
         <pc:spChg chg="mod">
-          <ac:chgData name="Kadelka, Claus [MATH]" userId="3587954921_tp_box_2" providerId="OAuth2" clId="{3A5D34D3-13CC-588F-87D8-4157F9E149E9}" dt="2026-02-14T04:50:53.840" v="2676" actId="20577"/>
+          <ac:chgData name="Kadelka, Claus [MATH]" userId="3587954921_tp_box_2" providerId="OAuth2" clId="{3A5D34D3-13CC-588F-87D8-4157F9E149E9}" dt="2026-05-14T16:02:40.326" v="5261" actId="115"/>
           <ac:spMkLst>
             <pc:docMk/>
-            <pc:sldMk cId="1259902216" sldId="266"/>
-            <ac:spMk id="19" creationId="{760B4262-C410-82C9-7060-8A4B80A5DCAD}"/>
+            <pc:sldMk cId="2913835367" sldId="271"/>
+            <ac:spMk id="17" creationId="{DCE14F3E-CB16-C533-3B63-D46FB2C17C1D}"/>
+          </ac:spMkLst>
+        </pc:spChg>
+        <pc:spChg chg="mod">
+          <ac:chgData name="Kadelka, Claus [MATH]" userId="3587954921_tp_box_2" providerId="OAuth2" clId="{3A5D34D3-13CC-588F-87D8-4157F9E149E9}" dt="2026-05-14T16:02:42.075" v="5262" actId="115"/>
+          <ac:spMkLst>
+            <pc:docMk/>
+            <pc:sldMk cId="2913835367" sldId="271"/>
+            <ac:spMk id="18" creationId="{895D657E-674E-54F6-3B4C-5AE3527EB8EF}"/>
+          </ac:spMkLst>
+        </pc:spChg>
+        <pc:spChg chg="mod">
+          <ac:chgData name="Kadelka, Claus [MATH]" userId="3587954921_tp_box_2" providerId="OAuth2" clId="{3A5D34D3-13CC-588F-87D8-4157F9E149E9}" dt="2026-05-14T16:02:37.867" v="5260" actId="115"/>
+          <ac:spMkLst>
+            <pc:docMk/>
+            <pc:sldMk cId="2913835367" sldId="271"/>
+            <ac:spMk id="19" creationId="{1F02FE9E-4FD2-F921-5BA0-18BE9218DF83}"/>
+          </ac:spMkLst>
+        </pc:spChg>
+        <pc:spChg chg="add del mod">
+          <ac:chgData name="Kadelka, Claus [MATH]" userId="3587954921_tp_box_2" providerId="OAuth2" clId="{3A5D34D3-13CC-588F-87D8-4157F9E149E9}" dt="2026-05-14T15:43:19.304" v="4920" actId="478"/>
+          <ac:spMkLst>
+            <pc:docMk/>
+            <pc:sldMk cId="2913835367" sldId="271"/>
+            <ac:spMk id="33" creationId="{4403BADF-E0D6-3151-995A-8D18E46A2E53}"/>
+          </ac:spMkLst>
+        </pc:spChg>
+        <pc:spChg chg="add mod">
+          <ac:chgData name="Kadelka, Claus [MATH]" userId="3587954921_tp_box_2" providerId="OAuth2" clId="{3A5D34D3-13CC-588F-87D8-4157F9E149E9}" dt="2026-05-14T16:01:49.796" v="5255" actId="1037"/>
+          <ac:spMkLst>
+            <pc:docMk/>
+            <pc:sldMk cId="2913835367" sldId="271"/>
+            <ac:spMk id="35" creationId="{3A9E022B-7D34-EC66-3B46-EB1C5CAC4AA2}"/>
           </ac:spMkLst>
         </pc:spChg>
         <pc:cxnChg chg="mod">
-          <ac:chgData name="Kadelka, Claus [MATH]" userId="3587954921_tp_box_2" providerId="OAuth2" clId="{3A5D34D3-13CC-588F-87D8-4157F9E149E9}" dt="2026-02-14T04:49:35.384" v="2668" actId="14100"/>
+          <ac:chgData name="Kadelka, Claus [MATH]" userId="3587954921_tp_box_2" providerId="OAuth2" clId="{3A5D34D3-13CC-588F-87D8-4157F9E149E9}" dt="2026-05-14T16:02:35.355" v="5259" actId="115"/>
           <ac:cxnSpMkLst>
             <pc:docMk/>
-            <pc:sldMk cId="1259902216" sldId="266"/>
-            <ac:cxnSpMk id="20" creationId="{D9E1893C-10B0-4EB4-271E-36DB21C0759D}"/>
+            <pc:sldMk cId="2913835367" sldId="271"/>
+            <ac:cxnSpMk id="20" creationId="{21035FF3-B2F8-1970-41DC-0EC573D38B69}"/>
           </ac:cxnSpMkLst>
         </pc:cxnChg>
         <pc:cxnChg chg="mod">
-          <ac:chgData name="Kadelka, Claus [MATH]" userId="3587954921_tp_box_2" providerId="OAuth2" clId="{3A5D34D3-13CC-588F-87D8-4157F9E149E9}" dt="2026-02-14T04:32:01.687" v="2475" actId="14100"/>
+          <ac:chgData name="Kadelka, Claus [MATH]" userId="3587954921_tp_box_2" providerId="OAuth2" clId="{3A5D34D3-13CC-588F-87D8-4157F9E149E9}" dt="2026-05-14T16:02:01.781" v="5257" actId="14100"/>
           <ac:cxnSpMkLst>
             <pc:docMk/>
-            <pc:sldMk cId="1259902216" sldId="266"/>
-            <ac:cxnSpMk id="24" creationId="{9B758DCF-4FFB-E8A7-F4B1-F970AFEE391E}"/>
+            <pc:sldMk cId="2913835367" sldId="271"/>
+            <ac:cxnSpMk id="24" creationId="{EF67EF4C-4E39-E91C-F453-CC39F99ABB1D}"/>
           </ac:cxnSpMkLst>
         </pc:cxnChg>
         <pc:cxnChg chg="mod">
-          <ac:chgData name="Kadelka, Claus [MATH]" userId="3587954921_tp_box_2" providerId="OAuth2" clId="{3A5D34D3-13CC-588F-87D8-4157F9E149E9}" dt="2026-02-14T04:32:01.687" v="2475" actId="14100"/>
+          <ac:chgData name="Kadelka, Claus [MATH]" userId="3587954921_tp_box_2" providerId="OAuth2" clId="{3A5D34D3-13CC-588F-87D8-4157F9E149E9}" dt="2026-05-14T16:02:42.075" v="5262" actId="115"/>
           <ac:cxnSpMkLst>
             <pc:docMk/>
-            <pc:sldMk cId="1259902216" sldId="266"/>
-            <ac:cxnSpMk id="29" creationId="{45BBD938-382A-FF54-6DE7-145EB8C52946}"/>
+            <pc:sldMk cId="2913835367" sldId="271"/>
+            <ac:cxnSpMk id="29" creationId="{115EB058-C45B-FB02-3C97-D78E7C1821CB}"/>
           </ac:cxnSpMkLst>
         </pc:cxnChg>
-      </pc:sldChg>
-      <pc:sldChg chg="addSp delSp modSp add mod">
-        <pc:chgData name="Kadelka, Claus [MATH]" userId="3587954921_tp_box_2" providerId="OAuth2" clId="{3A5D34D3-13CC-588F-87D8-4157F9E149E9}" dt="2026-02-15T04:26:43.637" v="3767" actId="20577"/>
-        <pc:sldMkLst>
-          <pc:docMk/>
-          <pc:sldMk cId="3969123646" sldId="267"/>
-        </pc:sldMkLst>
-        <pc:spChg chg="del mod">
-          <ac:chgData name="Kadelka, Claus [MATH]" userId="3587954921_tp_box_2" providerId="OAuth2" clId="{3A5D34D3-13CC-588F-87D8-4157F9E149E9}" dt="2026-02-14T05:04:56.130" v="2691" actId="478"/>
-          <ac:spMkLst>
-            <pc:docMk/>
-            <pc:sldMk cId="3969123646" sldId="267"/>
-            <ac:spMk id="2" creationId="{8E7901C3-C151-22FF-9FFD-EB5613DD0D9F}"/>
-          </ac:spMkLst>
-        </pc:spChg>
-        <pc:spChg chg="del mod">
-          <ac:chgData name="Kadelka, Claus [MATH]" userId="3587954921_tp_box_2" providerId="OAuth2" clId="{3A5D34D3-13CC-588F-87D8-4157F9E149E9}" dt="2026-02-14T05:04:56.130" v="2691" actId="478"/>
-          <ac:spMkLst>
-            <pc:docMk/>
-            <pc:sldMk cId="3969123646" sldId="267"/>
-            <ac:spMk id="17" creationId="{8B284048-34B6-E4DE-CB92-0B6C6DECF9F4}"/>
-          </ac:spMkLst>
-        </pc:spChg>
-        <pc:spChg chg="del mod">
-          <ac:chgData name="Kadelka, Claus [MATH]" userId="3587954921_tp_box_2" providerId="OAuth2" clId="{3A5D34D3-13CC-588F-87D8-4157F9E149E9}" dt="2026-02-14T05:04:56.130" v="2691" actId="478"/>
-          <ac:spMkLst>
-            <pc:docMk/>
-            <pc:sldMk cId="3969123646" sldId="267"/>
-            <ac:spMk id="18" creationId="{47ED38E3-FAD9-7E8B-AFDC-916FEA9E4C2E}"/>
-          </ac:spMkLst>
-        </pc:spChg>
-        <pc:spChg chg="del mod">
-          <ac:chgData name="Kadelka, Claus [MATH]" userId="3587954921_tp_box_2" providerId="OAuth2" clId="{3A5D34D3-13CC-588F-87D8-4157F9E149E9}" dt="2026-02-14T05:04:56.130" v="2691" actId="478"/>
-          <ac:spMkLst>
-            <pc:docMk/>
-            <pc:sldMk cId="3969123646" sldId="267"/>
-            <ac:spMk id="19" creationId="{118FEB16-4D15-D57C-84DD-6AD0F1BAE153}"/>
-          </ac:spMkLst>
-        </pc:spChg>
-        <pc:spChg chg="add mod">
-          <ac:chgData name="Kadelka, Claus [MATH]" userId="3587954921_tp_box_2" providerId="OAuth2" clId="{3A5D34D3-13CC-588F-87D8-4157F9E149E9}" dt="2026-02-14T18:06:50.580" v="3136" actId="1036"/>
-          <ac:spMkLst>
-            <pc:docMk/>
-            <pc:sldMk cId="3969123646" sldId="267"/>
-            <ac:spMk id="36" creationId="{131ACEFB-B5E1-2746-DCB1-B4C31FDC71D8}"/>
-          </ac:spMkLst>
-        </pc:spChg>
-        <pc:spChg chg="add mod">
-          <ac:chgData name="Kadelka, Claus [MATH]" userId="3587954921_tp_box_2" providerId="OAuth2" clId="{3A5D34D3-13CC-588F-87D8-4157F9E149E9}" dt="2026-02-14T05:20:01.433" v="2933" actId="207"/>
-          <ac:spMkLst>
-            <pc:docMk/>
-            <pc:sldMk cId="3969123646" sldId="267"/>
-            <ac:spMk id="37" creationId="{B945F9C1-5CEF-3EFF-E473-8E8CCE8BBFBA}"/>
-          </ac:spMkLst>
-        </pc:spChg>
-        <pc:spChg chg="add mod">
-          <ac:chgData name="Kadelka, Claus [MATH]" userId="3587954921_tp_box_2" providerId="OAuth2" clId="{3A5D34D3-13CC-588F-87D8-4157F9E149E9}" dt="2026-02-14T06:43:18.645" v="3023" actId="1037"/>
-          <ac:spMkLst>
-            <pc:docMk/>
-            <pc:sldMk cId="3969123646" sldId="267"/>
-            <ac:spMk id="38" creationId="{68F4EB2E-74E3-76DC-FD09-BDF426F85D80}"/>
-          </ac:spMkLst>
-        </pc:spChg>
-        <pc:spChg chg="add mod">
-          <ac:chgData name="Kadelka, Claus [MATH]" userId="3587954921_tp_box_2" providerId="OAuth2" clId="{3A5D34D3-13CC-588F-87D8-4157F9E149E9}" dt="2026-02-15T04:26:31.705" v="3761" actId="20577"/>
-          <ac:spMkLst>
-            <pc:docMk/>
-            <pc:sldMk cId="3969123646" sldId="267"/>
-            <ac:spMk id="47" creationId="{F47B4280-0D5A-295A-B080-5052EB8749A3}"/>
-          </ac:spMkLst>
-        </pc:spChg>
-        <pc:spChg chg="add del mod">
-          <ac:chgData name="Kadelka, Claus [MATH]" userId="3587954921_tp_box_2" providerId="OAuth2" clId="{3A5D34D3-13CC-588F-87D8-4157F9E149E9}" dt="2026-02-14T06:43:15.954" v="3020"/>
-          <ac:spMkLst>
-            <pc:docMk/>
-            <pc:sldMk cId="3969123646" sldId="267"/>
-            <ac:spMk id="49" creationId="{AECBDF3B-6FB0-76B7-ABC0-2F16C009FE9E}"/>
-          </ac:spMkLst>
-        </pc:spChg>
-        <pc:spChg chg="add del mod">
-          <ac:chgData name="Kadelka, Claus [MATH]" userId="3587954921_tp_box_2" providerId="OAuth2" clId="{3A5D34D3-13CC-588F-87D8-4157F9E149E9}" dt="2026-02-14T06:43:45.033" v="3026" actId="478"/>
-          <ac:spMkLst>
-            <pc:docMk/>
-            <pc:sldMk cId="3969123646" sldId="267"/>
-            <ac:spMk id="50" creationId="{9655597D-DB31-4B0B-3D2E-A1F5F6543D09}"/>
-          </ac:spMkLst>
-        </pc:spChg>
-        <pc:spChg chg="add mod">
-          <ac:chgData name="Kadelka, Claus [MATH]" userId="3587954921_tp_box_2" providerId="OAuth2" clId="{3A5D34D3-13CC-588F-87D8-4157F9E149E9}" dt="2026-02-14T18:24:16.791" v="3432" actId="11530"/>
-          <ac:spMkLst>
-            <pc:docMk/>
-            <pc:sldMk cId="3969123646" sldId="267"/>
-            <ac:spMk id="51" creationId="{266DE118-998B-5FAA-4E26-07B60CD83234}"/>
-          </ac:spMkLst>
-        </pc:spChg>
-        <pc:spChg chg="add mod">
-          <ac:chgData name="Kadelka, Claus [MATH]" userId="3587954921_tp_box_2" providerId="OAuth2" clId="{3A5D34D3-13CC-588F-87D8-4157F9E149E9}" dt="2026-02-14T18:24:16.791" v="3432" actId="11530"/>
-          <ac:spMkLst>
-            <pc:docMk/>
-            <pc:sldMk cId="3969123646" sldId="267"/>
-            <ac:spMk id="52" creationId="{C5244DB0-CD46-E988-A775-889C8ECFF9EE}"/>
-          </ac:spMkLst>
-        </pc:spChg>
-        <pc:spChg chg="add mod">
-          <ac:chgData name="Kadelka, Claus [MATH]" userId="3587954921_tp_box_2" providerId="OAuth2" clId="{3A5D34D3-13CC-588F-87D8-4157F9E149E9}" dt="2026-02-14T18:24:16.791" v="3432" actId="11530"/>
-          <ac:spMkLst>
-            <pc:docMk/>
-            <pc:sldMk cId="3969123646" sldId="267"/>
-            <ac:spMk id="53" creationId="{AEB96B36-A652-B35B-F6A4-A225C3BEC564}"/>
-          </ac:spMkLst>
-        </pc:spChg>
-        <pc:spChg chg="add mod">
-          <ac:chgData name="Kadelka, Claus [MATH]" userId="3587954921_tp_box_2" providerId="OAuth2" clId="{3A5D34D3-13CC-588F-87D8-4157F9E149E9}" dt="2026-02-14T18:11:01.123" v="3219" actId="1035"/>
-          <ac:spMkLst>
-            <pc:docMk/>
-            <pc:sldMk cId="3969123646" sldId="267"/>
-            <ac:spMk id="54" creationId="{0A4274D3-4387-9EC2-E996-40E01D28DBEF}"/>
-          </ac:spMkLst>
-        </pc:spChg>
-        <pc:spChg chg="add mod">
-          <ac:chgData name="Kadelka, Claus [MATH]" userId="3587954921_tp_box_2" providerId="OAuth2" clId="{3A5D34D3-13CC-588F-87D8-4157F9E149E9}" dt="2026-02-14T18:11:01.123" v="3219" actId="1035"/>
-          <ac:spMkLst>
-            <pc:docMk/>
-            <pc:sldMk cId="3969123646" sldId="267"/>
-            <ac:spMk id="55" creationId="{F69C56C5-144C-FD08-DDF9-B0EA26B33740}"/>
-          </ac:spMkLst>
-        </pc:spChg>
-        <pc:spChg chg="add mod">
-          <ac:chgData name="Kadelka, Claus [MATH]" userId="3587954921_tp_box_2" providerId="OAuth2" clId="{3A5D34D3-13CC-588F-87D8-4157F9E149E9}" dt="2026-02-14T18:11:01.123" v="3219" actId="1035"/>
-          <ac:spMkLst>
-            <pc:docMk/>
-            <pc:sldMk cId="3969123646" sldId="267"/>
-            <ac:spMk id="56" creationId="{EAF82B84-58B5-FA6D-8D7C-E8E7C454C28D}"/>
-          </ac:spMkLst>
-        </pc:spChg>
-        <pc:spChg chg="add mod">
-          <ac:chgData name="Kadelka, Claus [MATH]" userId="3587954921_tp_box_2" providerId="OAuth2" clId="{3A5D34D3-13CC-588F-87D8-4157F9E149E9}" dt="2026-02-14T18:11:54.706" v="3264" actId="1038"/>
-          <ac:spMkLst>
-            <pc:docMk/>
-            <pc:sldMk cId="3969123646" sldId="267"/>
-            <ac:spMk id="60" creationId="{E5A1A7DD-9DB7-E932-3880-3AC817E012BD}"/>
-          </ac:spMkLst>
-        </pc:spChg>
-        <pc:spChg chg="add mod">
-          <ac:chgData name="Kadelka, Claus [MATH]" userId="3587954921_tp_box_2" providerId="OAuth2" clId="{3A5D34D3-13CC-588F-87D8-4157F9E149E9}" dt="2026-02-14T18:11:47.030" v="3262" actId="1038"/>
-          <ac:spMkLst>
-            <pc:docMk/>
-            <pc:sldMk cId="3969123646" sldId="267"/>
-            <ac:spMk id="62" creationId="{0CCB232B-36D2-B648-1A2C-8CA41ED16F0B}"/>
-          </ac:spMkLst>
-        </pc:spChg>
-        <pc:spChg chg="add mod">
-          <ac:chgData name="Kadelka, Claus [MATH]" userId="3587954921_tp_box_2" providerId="OAuth2" clId="{3A5D34D3-13CC-588F-87D8-4157F9E149E9}" dt="2026-02-14T18:11:58.174" v="3270" actId="1038"/>
-          <ac:spMkLst>
-            <pc:docMk/>
-            <pc:sldMk cId="3969123646" sldId="267"/>
-            <ac:spMk id="63" creationId="{9ECA746E-418E-C1B1-F936-22F64F2AF81B}"/>
-          </ac:spMkLst>
-        </pc:spChg>
-        <pc:spChg chg="add del mod">
-          <ac:chgData name="Kadelka, Claus [MATH]" userId="3587954921_tp_box_2" providerId="OAuth2" clId="{3A5D34D3-13CC-588F-87D8-4157F9E149E9}" dt="2026-02-14T18:14:36.555" v="3296" actId="478"/>
-          <ac:spMkLst>
-            <pc:docMk/>
-            <pc:sldMk cId="3969123646" sldId="267"/>
-            <ac:spMk id="64" creationId="{4E9A4386-100D-4EB4-1580-796BC7C398EF}"/>
-          </ac:spMkLst>
-        </pc:spChg>
-        <pc:spChg chg="add mod">
-          <ac:chgData name="Kadelka, Claus [MATH]" userId="3587954921_tp_box_2" providerId="OAuth2" clId="{3A5D34D3-13CC-588F-87D8-4157F9E149E9}" dt="2026-02-15T04:26:41.938" v="3765" actId="20577"/>
-          <ac:spMkLst>
-            <pc:docMk/>
-            <pc:sldMk cId="3969123646" sldId="267"/>
-            <ac:spMk id="65" creationId="{9D5E9689-B409-C04C-CCB1-1A01D2CFDABD}"/>
-          </ac:spMkLst>
-        </pc:spChg>
-        <pc:spChg chg="add mod">
-          <ac:chgData name="Kadelka, Claus [MATH]" userId="3587954921_tp_box_2" providerId="OAuth2" clId="{3A5D34D3-13CC-588F-87D8-4157F9E149E9}" dt="2026-02-15T04:26:43.637" v="3767" actId="20577"/>
-          <ac:spMkLst>
-            <pc:docMk/>
-            <pc:sldMk cId="3969123646" sldId="267"/>
-            <ac:spMk id="68" creationId="{A04EBBE0-AD4F-1313-9DD7-3B41CA465944}"/>
-          </ac:spMkLst>
-        </pc:spChg>
-        <pc:spChg chg="add del mod">
-          <ac:chgData name="Kadelka, Claus [MATH]" userId="3587954921_tp_box_2" providerId="OAuth2" clId="{3A5D34D3-13CC-588F-87D8-4157F9E149E9}" dt="2026-02-14T18:28:22.155" v="3585" actId="478"/>
-          <ac:spMkLst>
-            <pc:docMk/>
-            <pc:sldMk cId="3969123646" sldId="267"/>
-            <ac:spMk id="69" creationId="{F9252300-3930-569C-CE9A-ACA174035FD2}"/>
-          </ac:spMkLst>
-        </pc:spChg>
-        <pc:spChg chg="add del mod">
-          <ac:chgData name="Kadelka, Claus [MATH]" userId="3587954921_tp_box_2" providerId="OAuth2" clId="{3A5D34D3-13CC-588F-87D8-4157F9E149E9}" dt="2026-02-15T04:22:24.752" v="3727" actId="478"/>
-          <ac:spMkLst>
-            <pc:docMk/>
-            <pc:sldMk cId="3969123646" sldId="267"/>
-            <ac:spMk id="70" creationId="{3E3C00BC-EF6A-22C5-045C-727C5E8EE49D}"/>
-          </ac:spMkLst>
-        </pc:spChg>
-        <pc:spChg chg="add del mod">
-          <ac:chgData name="Kadelka, Claus [MATH]" userId="3587954921_tp_box_2" providerId="OAuth2" clId="{3A5D34D3-13CC-588F-87D8-4157F9E149E9}" dt="2026-02-15T04:22:00.578" v="3712" actId="478"/>
-          <ac:spMkLst>
-            <pc:docMk/>
-            <pc:sldMk cId="3969123646" sldId="267"/>
-            <ac:spMk id="71" creationId="{57A0C900-BDBF-7602-76C7-C8179C3D8585}"/>
-          </ac:spMkLst>
-        </pc:spChg>
-        <pc:spChg chg="add del mod">
-          <ac:chgData name="Kadelka, Claus [MATH]" userId="3587954921_tp_box_2" providerId="OAuth2" clId="{3A5D34D3-13CC-588F-87D8-4157F9E149E9}" dt="2026-02-15T04:22:22.535" v="3726" actId="478"/>
-          <ac:spMkLst>
-            <pc:docMk/>
-            <pc:sldMk cId="3969123646" sldId="267"/>
-            <ac:spMk id="72" creationId="{A08DDC07-5D06-B6FA-E8D1-FBB934EEE446}"/>
-          </ac:spMkLst>
-        </pc:spChg>
-        <pc:grpChg chg="add mod">
-          <ac:chgData name="Kadelka, Claus [MATH]" userId="3587954921_tp_box_2" providerId="OAuth2" clId="{3A5D34D3-13CC-588F-87D8-4157F9E149E9}" dt="2026-02-14T05:18:51.099" v="2925" actId="1035"/>
-          <ac:grpSpMkLst>
-            <pc:docMk/>
-            <pc:sldMk cId="3969123646" sldId="267"/>
-            <ac:grpSpMk id="10" creationId="{26F90DE5-C098-4DBB-D4DB-170DF595F6F9}"/>
-          </ac:grpSpMkLst>
-        </pc:grpChg>
-        <pc:grpChg chg="add mod">
-          <ac:chgData name="Kadelka, Claus [MATH]" userId="3587954921_tp_box_2" providerId="OAuth2" clId="{3A5D34D3-13CC-588F-87D8-4157F9E149E9}" dt="2026-02-14T06:40:32.442" v="2964" actId="1076"/>
-          <ac:grpSpMkLst>
-            <pc:docMk/>
-            <pc:sldMk cId="3969123646" sldId="267"/>
-            <ac:grpSpMk id="39" creationId="{8C1D2C70-D422-9BB2-3C35-B127ABEC36EF}"/>
-          </ac:grpSpMkLst>
-        </pc:grpChg>
-        <pc:grpChg chg="add mod">
-          <ac:chgData name="Kadelka, Claus [MATH]" userId="3587954921_tp_box_2" providerId="OAuth2" clId="{3A5D34D3-13CC-588F-87D8-4157F9E149E9}" dt="2026-02-14T06:44:53.358" v="3044" actId="1076"/>
-          <ac:grpSpMkLst>
-            <pc:docMk/>
-            <pc:sldMk cId="3969123646" sldId="267"/>
-            <ac:grpSpMk id="48" creationId="{B1400C4D-310A-AA57-EC29-A25F552824B5}"/>
-          </ac:grpSpMkLst>
-        </pc:grpChg>
-        <pc:grpChg chg="add mod">
-          <ac:chgData name="Kadelka, Claus [MATH]" userId="3587954921_tp_box_2" providerId="OAuth2" clId="{3A5D34D3-13CC-588F-87D8-4157F9E149E9}" dt="2026-02-14T18:05:54.453" v="3101" actId="14100"/>
-          <ac:grpSpMkLst>
-            <pc:docMk/>
-            <pc:sldMk cId="3969123646" sldId="267"/>
-            <ac:grpSpMk id="59" creationId="{155FAC3B-1467-7B95-DDD0-7BC68F32E7F5}"/>
-          </ac:grpSpMkLst>
-        </pc:grpChg>
-        <pc:picChg chg="add mod modCrop">
-          <ac:chgData name="Kadelka, Claus [MATH]" userId="3587954921_tp_box_2" providerId="OAuth2" clId="{3A5D34D3-13CC-588F-87D8-4157F9E149E9}" dt="2026-02-14T18:08:05.157" v="3161" actId="14100"/>
-          <ac:picMkLst>
-            <pc:docMk/>
-            <pc:sldMk cId="3969123646" sldId="267"/>
-            <ac:picMk id="4" creationId="{B8A2E544-5711-3568-286D-4624EB7E5AD5}"/>
-          </ac:picMkLst>
-        </pc:picChg>
-        <pc:picChg chg="add mod modCrop">
-          <ac:chgData name="Kadelka, Claus [MATH]" userId="3587954921_tp_box_2" providerId="OAuth2" clId="{3A5D34D3-13CC-588F-87D8-4157F9E149E9}" dt="2026-02-14T18:08:05.157" v="3161" actId="14100"/>
-          <ac:picMkLst>
-            <pc:docMk/>
-            <pc:sldMk cId="3969123646" sldId="267"/>
-            <ac:picMk id="5" creationId="{C9F8EB2C-EBD8-EE54-53F2-21E9A89DEDE6}"/>
-          </ac:picMkLst>
-        </pc:picChg>
-        <pc:picChg chg="add mod modCrop">
-          <ac:chgData name="Kadelka, Claus [MATH]" userId="3587954921_tp_box_2" providerId="OAuth2" clId="{3A5D34D3-13CC-588F-87D8-4157F9E149E9}" dt="2026-02-14T18:08:05.157" v="3161" actId="14100"/>
-          <ac:picMkLst>
-            <pc:docMk/>
-            <pc:sldMk cId="3969123646" sldId="267"/>
-            <ac:picMk id="6" creationId="{478A1481-D713-2A5B-4F72-6C1583451A48}"/>
-          </ac:picMkLst>
-        </pc:picChg>
-        <pc:picChg chg="add del mod">
-          <ac:chgData name="Kadelka, Claus [MATH]" userId="3587954921_tp_box_2" providerId="OAuth2" clId="{3A5D34D3-13CC-588F-87D8-4157F9E149E9}" dt="2026-02-14T05:18:20.259" v="2917" actId="478"/>
-          <ac:picMkLst>
-            <pc:docMk/>
-            <pc:sldMk cId="3969123646" sldId="267"/>
-            <ac:picMk id="8" creationId="{C815C8C4-9C61-851D-C365-E5E67BCA78AE}"/>
-          </ac:picMkLst>
-        </pc:picChg>
-        <pc:picChg chg="add mod modCrop">
-          <ac:chgData name="Kadelka, Claus [MATH]" userId="3587954921_tp_box_2" providerId="OAuth2" clId="{3A5D34D3-13CC-588F-87D8-4157F9E149E9}" dt="2026-02-14T18:06:22.131" v="3110" actId="14100"/>
-          <ac:picMkLst>
-            <pc:docMk/>
-            <pc:sldMk cId="3969123646" sldId="267"/>
-            <ac:picMk id="9" creationId="{7337774E-51DF-27FD-E0FA-A7E000912091}"/>
-          </ac:picMkLst>
-        </pc:picChg>
-        <pc:picChg chg="add del mod">
-          <ac:chgData name="Kadelka, Claus [MATH]" userId="3587954921_tp_box_2" providerId="OAuth2" clId="{3A5D34D3-13CC-588F-87D8-4157F9E149E9}" dt="2026-02-14T05:09:39.850" v="2736" actId="478"/>
-          <ac:picMkLst>
-            <pc:docMk/>
-            <pc:sldMk cId="3969123646" sldId="267"/>
-            <ac:picMk id="12" creationId="{66DAEFED-18F9-5834-8C1B-ED7D3D932452}"/>
-          </ac:picMkLst>
-        </pc:picChg>
-        <pc:picChg chg="add del mod">
-          <ac:chgData name="Kadelka, Claus [MATH]" userId="3587954921_tp_box_2" providerId="OAuth2" clId="{3A5D34D3-13CC-588F-87D8-4157F9E149E9}" dt="2026-02-14T05:10:32.676" v="2749" actId="478"/>
-          <ac:picMkLst>
-            <pc:docMk/>
-            <pc:sldMk cId="3969123646" sldId="267"/>
-            <ac:picMk id="14" creationId="{39F28755-B438-511A-CDCC-D260A065B455}"/>
-          </ac:picMkLst>
-        </pc:picChg>
-        <pc:picChg chg="add del mod">
-          <ac:chgData name="Kadelka, Claus [MATH]" userId="3587954921_tp_box_2" providerId="OAuth2" clId="{3A5D34D3-13CC-588F-87D8-4157F9E149E9}" dt="2026-02-14T05:10:53.535" v="2752" actId="478"/>
-          <ac:picMkLst>
-            <pc:docMk/>
-            <pc:sldMk cId="3969123646" sldId="267"/>
-            <ac:picMk id="16" creationId="{B9FE26E4-C66E-2CCF-7F5C-C244F818B71E}"/>
-          </ac:picMkLst>
-        </pc:picChg>
-        <pc:picChg chg="add mod">
-          <ac:chgData name="Kadelka, Claus [MATH]" userId="3587954921_tp_box_2" providerId="OAuth2" clId="{3A5D34D3-13CC-588F-87D8-4157F9E149E9}" dt="2026-02-14T06:44:53.358" v="3044" actId="1076"/>
-          <ac:picMkLst>
-            <pc:docMk/>
-            <pc:sldMk cId="3969123646" sldId="267"/>
-            <ac:picMk id="22" creationId="{033A2937-DAA1-04A9-3BAC-58541A026B26}"/>
-          </ac:picMkLst>
-        </pc:picChg>
-        <pc:picChg chg="add del mod">
-          <ac:chgData name="Kadelka, Claus [MATH]" userId="3587954921_tp_box_2" providerId="OAuth2" clId="{3A5D34D3-13CC-588F-87D8-4157F9E149E9}" dt="2026-02-14T05:12:47.462" v="2772" actId="478"/>
-          <ac:picMkLst>
-            <pc:docMk/>
-            <pc:sldMk cId="3969123646" sldId="267"/>
-            <ac:picMk id="25" creationId="{45EBEE73-6752-3BFA-EFA9-589E559CB3A9}"/>
-          </ac:picMkLst>
-        </pc:picChg>
-        <pc:picChg chg="add del mod">
-          <ac:chgData name="Kadelka, Claus [MATH]" userId="3587954921_tp_box_2" providerId="OAuth2" clId="{3A5D34D3-13CC-588F-87D8-4157F9E149E9}" dt="2026-02-14T05:13:01.615" v="2777" actId="478"/>
-          <ac:picMkLst>
-            <pc:docMk/>
-            <pc:sldMk cId="3969123646" sldId="267"/>
-            <ac:picMk id="27" creationId="{AE33E902-AF38-1BDA-34BB-B4DAC15840F9}"/>
-          </ac:picMkLst>
-        </pc:picChg>
-        <pc:picChg chg="add del mod">
-          <ac:chgData name="Kadelka, Claus [MATH]" userId="3587954921_tp_box_2" providerId="OAuth2" clId="{3A5D34D3-13CC-588F-87D8-4157F9E149E9}" dt="2026-02-14T05:13:47.012" v="2802" actId="478"/>
-          <ac:picMkLst>
-            <pc:docMk/>
-            <pc:sldMk cId="3969123646" sldId="267"/>
-            <ac:picMk id="30" creationId="{91A38B06-8333-7438-2F16-ABC7691AECAA}"/>
-          </ac:picMkLst>
-        </pc:picChg>
-        <pc:picChg chg="add del mod">
-          <ac:chgData name="Kadelka, Claus [MATH]" userId="3587954921_tp_box_2" providerId="OAuth2" clId="{3A5D34D3-13CC-588F-87D8-4157F9E149E9}" dt="2026-02-14T05:16:21.678" v="2834" actId="478"/>
-          <ac:picMkLst>
-            <pc:docMk/>
-            <pc:sldMk cId="3969123646" sldId="267"/>
-            <ac:picMk id="32" creationId="{64D2C8FF-7AC7-1A61-E370-E8F0AB8E9C5B}"/>
-          </ac:picMkLst>
-        </pc:picChg>
-        <pc:picChg chg="add del mod">
-          <ac:chgData name="Kadelka, Claus [MATH]" userId="3587954921_tp_box_2" providerId="OAuth2" clId="{3A5D34D3-13CC-588F-87D8-4157F9E149E9}" dt="2026-02-14T05:16:20.234" v="2833" actId="478"/>
-          <ac:picMkLst>
-            <pc:docMk/>
-            <pc:sldMk cId="3969123646" sldId="267"/>
-            <ac:picMk id="33" creationId="{C7310022-F1CB-D975-71FC-1A4CAEED96E5}"/>
-          </ac:picMkLst>
-        </pc:picChg>
-        <pc:picChg chg="add del mod">
-          <ac:chgData name="Kadelka, Claus [MATH]" userId="3587954921_tp_box_2" providerId="OAuth2" clId="{3A5D34D3-13CC-588F-87D8-4157F9E149E9}" dt="2026-02-14T18:07:02.688" v="3155" actId="478"/>
-          <ac:picMkLst>
-            <pc:docMk/>
-            <pc:sldMk cId="3969123646" sldId="267"/>
-            <ac:picMk id="35" creationId="{4159879C-5554-3CC6-8063-D6DF12751BE3}"/>
-          </ac:picMkLst>
-        </pc:picChg>
-        <pc:picChg chg="add del mod">
-          <ac:chgData name="Kadelka, Claus [MATH]" userId="3587954921_tp_box_2" providerId="OAuth2" clId="{3A5D34D3-13CC-588F-87D8-4157F9E149E9}" dt="2026-02-14T06:38:25.889" v="2941" actId="478"/>
-          <ac:picMkLst>
-            <pc:docMk/>
-            <pc:sldMk cId="3969123646" sldId="267"/>
-            <ac:picMk id="41" creationId="{2639B38F-AA13-2FAE-DA9A-4AF115DAFB54}"/>
-          </ac:picMkLst>
-        </pc:picChg>
-        <pc:picChg chg="add del mod modCrop">
-          <ac:chgData name="Kadelka, Claus [MATH]" userId="3587954921_tp_box_2" providerId="OAuth2" clId="{3A5D34D3-13CC-588F-87D8-4157F9E149E9}" dt="2026-02-15T04:25:36.880" v="3744" actId="478"/>
-          <ac:picMkLst>
-            <pc:docMk/>
-            <pc:sldMk cId="3969123646" sldId="267"/>
-            <ac:picMk id="43" creationId="{387325A1-D7F8-28C0-6559-F87AFC2047CC}"/>
-          </ac:picMkLst>
-        </pc:picChg>
-        <pc:picChg chg="add mod modCrop">
-          <ac:chgData name="Kadelka, Claus [MATH]" userId="3587954921_tp_box_2" providerId="OAuth2" clId="{3A5D34D3-13CC-588F-87D8-4157F9E149E9}" dt="2026-02-14T06:41:40.205" v="2982" actId="1076"/>
-          <ac:picMkLst>
-            <pc:docMk/>
-            <pc:sldMk cId="3969123646" sldId="267"/>
-            <ac:picMk id="45" creationId="{F5B7A53E-C96F-CC75-8D8C-0272B1423DD8}"/>
-          </ac:picMkLst>
-        </pc:picChg>
-        <pc:picChg chg="add mod modCrop">
-          <ac:chgData name="Kadelka, Claus [MATH]" userId="3587954921_tp_box_2" providerId="OAuth2" clId="{3A5D34D3-13CC-588F-87D8-4157F9E149E9}" dt="2026-02-14T06:41:40.205" v="2982" actId="1076"/>
-          <ac:picMkLst>
-            <pc:docMk/>
-            <pc:sldMk cId="3969123646" sldId="267"/>
-            <ac:picMk id="46" creationId="{1E61C540-0E45-59F5-3212-1A7A29D09FD9}"/>
-          </ac:picMkLst>
-        </pc:picChg>
-        <pc:picChg chg="add mod">
-          <ac:chgData name="Kadelka, Claus [MATH]" userId="3587954921_tp_box_2" providerId="OAuth2" clId="{3A5D34D3-13CC-588F-87D8-4157F9E149E9}" dt="2026-02-14T18:06:30.211" v="3120" actId="1036"/>
-          <ac:picMkLst>
-            <pc:docMk/>
-            <pc:sldMk cId="3969123646" sldId="267"/>
-            <ac:picMk id="58" creationId="{03DA70CE-505C-172E-40ED-997C44F92CCA}"/>
-          </ac:picMkLst>
-        </pc:picChg>
-        <pc:picChg chg="add del mod">
-          <ac:chgData name="Kadelka, Claus [MATH]" userId="3587954921_tp_box_2" providerId="OAuth2" clId="{3A5D34D3-13CC-588F-87D8-4157F9E149E9}" dt="2026-02-14T18:16:43.103" v="3327" actId="478"/>
-          <ac:picMkLst>
-            <pc:docMk/>
-            <pc:sldMk cId="3969123646" sldId="267"/>
-            <ac:picMk id="67" creationId="{B85E9254-FAF0-869A-DB0F-94BD5A0836C6}"/>
-          </ac:picMkLst>
-        </pc:picChg>
-        <pc:picChg chg="add del mod">
-          <ac:chgData name="Kadelka, Claus [MATH]" userId="3587954921_tp_box_2" providerId="OAuth2" clId="{3A5D34D3-13CC-588F-87D8-4157F9E149E9}" dt="2026-02-15T04:25:17.033" v="3741" actId="478"/>
-          <ac:picMkLst>
-            <pc:docMk/>
-            <pc:sldMk cId="3969123646" sldId="267"/>
-            <ac:picMk id="74" creationId="{4F402392-8EC2-9A08-627B-B2A75F31A1A4}"/>
-          </ac:picMkLst>
-        </pc:picChg>
-        <pc:picChg chg="add mod modCrop">
-          <ac:chgData name="Kadelka, Claus [MATH]" userId="3587954921_tp_box_2" providerId="OAuth2" clId="{3A5D34D3-13CC-588F-87D8-4157F9E149E9}" dt="2026-02-15T04:26:02.219" v="3756" actId="732"/>
-          <ac:picMkLst>
-            <pc:docMk/>
-            <pc:sldMk cId="3969123646" sldId="267"/>
-            <ac:picMk id="76" creationId="{BDEA4C74-EAE5-68AB-D3AA-C4D815969BB6}"/>
-          </ac:picMkLst>
-        </pc:picChg>
-        <pc:cxnChg chg="del mod">
-          <ac:chgData name="Kadelka, Claus [MATH]" userId="3587954921_tp_box_2" providerId="OAuth2" clId="{3A5D34D3-13CC-588F-87D8-4157F9E149E9}" dt="2026-02-14T05:04:56.130" v="2691" actId="478"/>
+        <pc:cxnChg chg="add mod">
+          <ac:chgData name="Kadelka, Claus [MATH]" userId="3587954921_tp_box_2" providerId="OAuth2" clId="{3A5D34D3-13CC-588F-87D8-4157F9E149E9}" dt="2026-05-14T16:01:36.735" v="5244" actId="14100"/>
           <ac:cxnSpMkLst>
             <pc:docMk/>
-            <pc:sldMk cId="3969123646" sldId="267"/>
-            <ac:cxnSpMk id="20" creationId="{2C250E5E-7D61-1D28-DBA1-AF1CAE232509}"/>
+            <pc:sldMk cId="2913835367" sldId="271"/>
+            <ac:cxnSpMk id="30" creationId="{2025B2D3-15E3-475D-A8AE-69940803CA2C}"/>
           </ac:cxnSpMkLst>
         </pc:cxnChg>
-        <pc:cxnChg chg="del mod">
-          <ac:chgData name="Kadelka, Claus [MATH]" userId="3587954921_tp_box_2" providerId="OAuth2" clId="{3A5D34D3-13CC-588F-87D8-4157F9E149E9}" dt="2026-02-14T05:04:56.130" v="2691" actId="478"/>
-          <ac:cxnSpMkLst>
-            <pc:docMk/>
-            <pc:sldMk cId="3969123646" sldId="267"/>
-            <ac:cxnSpMk id="24" creationId="{00954D0B-929E-929B-8E93-285A3D16A569}"/>
-          </ac:cxnSpMkLst>
-        </pc:cxnChg>
-        <pc:cxnChg chg="del mod">
-          <ac:chgData name="Kadelka, Claus [MATH]" userId="3587954921_tp_box_2" providerId="OAuth2" clId="{3A5D34D3-13CC-588F-87D8-4157F9E149E9}" dt="2026-02-14T05:04:56.130" v="2691" actId="478"/>
-          <ac:cxnSpMkLst>
-            <pc:docMk/>
-            <pc:sldMk cId="3969123646" sldId="267"/>
-            <ac:cxnSpMk id="29" creationId="{AB77435C-61D2-DE38-C3DD-42F285A2A0F7}"/>
-          </ac:cxnSpMkLst>
-        </pc:cxnChg>
-      </pc:sldChg>
-      <pc:sldChg chg="addSp delSp modSp add mod">
-        <pc:chgData name="Kadelka, Claus [MATH]" userId="3587954921_tp_box_2" providerId="OAuth2" clId="{3A5D34D3-13CC-588F-87D8-4157F9E149E9}" dt="2026-02-14T18:21:00.629" v="3384" actId="478"/>
-        <pc:sldMkLst>
-          <pc:docMk/>
-          <pc:sldMk cId="2485313455" sldId="268"/>
-        </pc:sldMkLst>
-        <pc:spChg chg="del">
-          <ac:chgData name="Kadelka, Claus [MATH]" userId="3587954921_tp_box_2" providerId="OAuth2" clId="{3A5D34D3-13CC-588F-87D8-4157F9E149E9}" dt="2026-02-14T18:20:03.219" v="3374" actId="478"/>
-          <ac:spMkLst>
-            <pc:docMk/>
-            <pc:sldMk cId="2485313455" sldId="268"/>
-            <ac:spMk id="3" creationId="{FBE52A69-C8FB-0CA9-1B14-942382A241C2}"/>
-          </ac:spMkLst>
-        </pc:spChg>
-        <pc:spChg chg="del">
-          <ac:chgData name="Kadelka, Claus [MATH]" userId="3587954921_tp_box_2" providerId="OAuth2" clId="{3A5D34D3-13CC-588F-87D8-4157F9E149E9}" dt="2026-02-14T18:20:03.219" v="3374" actId="478"/>
-          <ac:spMkLst>
-            <pc:docMk/>
-            <pc:sldMk cId="2485313455" sldId="268"/>
-            <ac:spMk id="4" creationId="{148679FC-B5BA-F6D1-4F67-C4C5762AA3F7}"/>
-          </ac:spMkLst>
-        </pc:spChg>
-        <pc:spChg chg="del">
-          <ac:chgData name="Kadelka, Claus [MATH]" userId="3587954921_tp_box_2" providerId="OAuth2" clId="{3A5D34D3-13CC-588F-87D8-4157F9E149E9}" dt="2026-02-14T18:20:03.219" v="3374" actId="478"/>
-          <ac:spMkLst>
-            <pc:docMk/>
-            <pc:sldMk cId="2485313455" sldId="268"/>
-            <ac:spMk id="6" creationId="{54BC3702-1249-0979-E64C-907678C0FAC2}"/>
-          </ac:spMkLst>
-        </pc:spChg>
-        <pc:spChg chg="del">
-          <ac:chgData name="Kadelka, Claus [MATH]" userId="3587954921_tp_box_2" providerId="OAuth2" clId="{3A5D34D3-13CC-588F-87D8-4157F9E149E9}" dt="2026-02-14T18:20:03.219" v="3374" actId="478"/>
-          <ac:spMkLst>
-            <pc:docMk/>
-            <pc:sldMk cId="2485313455" sldId="268"/>
-            <ac:spMk id="7" creationId="{284282C1-671E-CAB9-1DD6-00DCC8808F3D}"/>
-          </ac:spMkLst>
-        </pc:spChg>
-        <pc:spChg chg="del">
-          <ac:chgData name="Kadelka, Claus [MATH]" userId="3587954921_tp_box_2" providerId="OAuth2" clId="{3A5D34D3-13CC-588F-87D8-4157F9E149E9}" dt="2026-02-14T18:20:03.219" v="3374" actId="478"/>
-          <ac:spMkLst>
-            <pc:docMk/>
-            <pc:sldMk cId="2485313455" sldId="268"/>
-            <ac:spMk id="8" creationId="{2AA73344-F50E-D848-38D9-668BBC074716}"/>
-          </ac:spMkLst>
-        </pc:spChg>
-        <pc:spChg chg="del">
-          <ac:chgData name="Kadelka, Claus [MATH]" userId="3587954921_tp_box_2" providerId="OAuth2" clId="{3A5D34D3-13CC-588F-87D8-4157F9E149E9}" dt="2026-02-14T18:20:03.219" v="3374" actId="478"/>
-          <ac:spMkLst>
-            <pc:docMk/>
-            <pc:sldMk cId="2485313455" sldId="268"/>
-            <ac:spMk id="9" creationId="{CF516D7A-4080-9A06-0B6F-D0DB0A685A27}"/>
-          </ac:spMkLst>
-        </pc:spChg>
-        <pc:picChg chg="add mod">
-          <ac:chgData name="Kadelka, Claus [MATH]" userId="3587954921_tp_box_2" providerId="OAuth2" clId="{3A5D34D3-13CC-588F-87D8-4157F9E149E9}" dt="2026-02-14T18:20:12.894" v="3378" actId="1076"/>
-          <ac:picMkLst>
-            <pc:docMk/>
-            <pc:sldMk cId="2485313455" sldId="268"/>
-            <ac:picMk id="5" creationId="{D6B92E9B-2B62-9813-9B2E-E99C5A75D26E}"/>
-          </ac:picMkLst>
-        </pc:picChg>
-        <pc:picChg chg="add del mod">
-          <ac:chgData name="Kadelka, Claus [MATH]" userId="3587954921_tp_box_2" providerId="OAuth2" clId="{3A5D34D3-13CC-588F-87D8-4157F9E149E9}" dt="2026-02-14T18:21:00.629" v="3384" actId="478"/>
-          <ac:picMkLst>
-            <pc:docMk/>
-            <pc:sldMk cId="2485313455" sldId="268"/>
-            <ac:picMk id="11" creationId="{8C5D8695-F63D-4871-7E28-7832E2B3843A}"/>
-          </ac:picMkLst>
-        </pc:picChg>
-      </pc:sldChg>
-      <pc:sldChg chg="addSp delSp modSp add mod">
-        <pc:chgData name="Kadelka, Claus [MATH]" userId="3587954921_tp_box_2" providerId="OAuth2" clId="{3A5D34D3-13CC-588F-87D8-4157F9E149E9}" dt="2026-02-15T04:29:40.342" v="3799" actId="1076"/>
-        <pc:sldMkLst>
-          <pc:docMk/>
-          <pc:sldMk cId="3162223427" sldId="269"/>
-        </pc:sldMkLst>
-        <pc:spChg chg="add mod">
-          <ac:chgData name="Kadelka, Claus [MATH]" userId="3587954921_tp_box_2" providerId="OAuth2" clId="{3A5D34D3-13CC-588F-87D8-4157F9E149E9}" dt="2026-02-14T18:30:21.287" v="3620" actId="167"/>
-          <ac:spMkLst>
-            <pc:docMk/>
-            <pc:sldMk cId="3162223427" sldId="269"/>
-            <ac:spMk id="2" creationId="{1C75393A-D68B-FAA7-E82F-EC538291B8B8}"/>
-          </ac:spMkLst>
-        </pc:spChg>
-        <pc:spChg chg="add mod">
-          <ac:chgData name="Kadelka, Claus [MATH]" userId="3587954921_tp_box_2" providerId="OAuth2" clId="{3A5D34D3-13CC-588F-87D8-4157F9E149E9}" dt="2026-02-14T18:30:33.112" v="3622" actId="167"/>
-          <ac:spMkLst>
-            <pc:docMk/>
-            <pc:sldMk cId="3162223427" sldId="269"/>
-            <ac:spMk id="3" creationId="{FFD36978-2F52-9BDA-24D8-EA3DEC8724EF}"/>
-          </ac:spMkLst>
-        </pc:spChg>
-        <pc:spChg chg="add mod">
-          <ac:chgData name="Kadelka, Claus [MATH]" userId="3587954921_tp_box_2" providerId="OAuth2" clId="{3A5D34D3-13CC-588F-87D8-4157F9E149E9}" dt="2026-02-15T04:27:16.978" v="3769"/>
-          <ac:spMkLst>
-            <pc:docMk/>
-            <pc:sldMk cId="3162223427" sldId="269"/>
-            <ac:spMk id="8" creationId="{92E97A4B-9EDF-C370-1523-722C9B41B650}"/>
-          </ac:spMkLst>
-        </pc:spChg>
-        <pc:spChg chg="add mod">
-          <ac:chgData name="Kadelka, Claus [MATH]" userId="3587954921_tp_box_2" providerId="OAuth2" clId="{3A5D34D3-13CC-588F-87D8-4157F9E149E9}" dt="2026-02-15T04:27:16.978" v="3769"/>
-          <ac:spMkLst>
-            <pc:docMk/>
-            <pc:sldMk cId="3162223427" sldId="269"/>
-            <ac:spMk id="11" creationId="{C929C0AB-4AA7-59E4-717A-A7B3DC6DB4D2}"/>
-          </ac:spMkLst>
-        </pc:spChg>
-        <pc:spChg chg="mod">
-          <ac:chgData name="Kadelka, Claus [MATH]" userId="3587954921_tp_box_2" providerId="OAuth2" clId="{3A5D34D3-13CC-588F-87D8-4157F9E149E9}" dt="2026-02-15T04:29:40.342" v="3799" actId="1076"/>
-          <ac:spMkLst>
-            <pc:docMk/>
-            <pc:sldMk cId="3162223427" sldId="269"/>
-            <ac:spMk id="47" creationId="{097B63C5-14A5-B148-DC44-26176E6F7DD9}"/>
-          </ac:spMkLst>
-        </pc:spChg>
-        <pc:spChg chg="del">
-          <ac:chgData name="Kadelka, Claus [MATH]" userId="3587954921_tp_box_2" providerId="OAuth2" clId="{3A5D34D3-13CC-588F-87D8-4157F9E149E9}" dt="2026-02-14T18:26:13.618" v="3487" actId="478"/>
-          <ac:spMkLst>
-            <pc:docMk/>
-            <pc:sldMk cId="3162223427" sldId="269"/>
-            <ac:spMk id="51" creationId="{CECDC3F8-86D2-C046-747B-C7EE2DE1CD27}"/>
-          </ac:spMkLst>
-        </pc:spChg>
-        <pc:spChg chg="del">
-          <ac:chgData name="Kadelka, Claus [MATH]" userId="3587954921_tp_box_2" providerId="OAuth2" clId="{3A5D34D3-13CC-588F-87D8-4157F9E149E9}" dt="2026-02-14T18:26:15.134" v="3488" actId="478"/>
-          <ac:spMkLst>
-            <pc:docMk/>
-            <pc:sldMk cId="3162223427" sldId="269"/>
-            <ac:spMk id="52" creationId="{E3B146AE-12AC-8514-9D2C-4B43716F3E5C}"/>
-          </ac:spMkLst>
-        </pc:spChg>
-        <pc:spChg chg="del">
-          <ac:chgData name="Kadelka, Claus [MATH]" userId="3587954921_tp_box_2" providerId="OAuth2" clId="{3A5D34D3-13CC-588F-87D8-4157F9E149E9}" dt="2026-02-14T18:25:04.301" v="3470" actId="478"/>
-          <ac:spMkLst>
-            <pc:docMk/>
-            <pc:sldMk cId="3162223427" sldId="269"/>
-            <ac:spMk id="53" creationId="{D0930292-5B95-81E2-7070-EAE83B75AC15}"/>
-          </ac:spMkLst>
-        </pc:spChg>
-        <pc:spChg chg="mod">
-          <ac:chgData name="Kadelka, Claus [MATH]" userId="3587954921_tp_box_2" providerId="OAuth2" clId="{3A5D34D3-13CC-588F-87D8-4157F9E149E9}" dt="2026-02-14T18:30:41.606" v="3623" actId="555"/>
-          <ac:spMkLst>
-            <pc:docMk/>
-            <pc:sldMk cId="3162223427" sldId="269"/>
-            <ac:spMk id="54" creationId="{DCDD72F6-F348-9F5B-B442-6CFA46160C7E}"/>
-          </ac:spMkLst>
-        </pc:spChg>
-        <pc:spChg chg="mod">
-          <ac:chgData name="Kadelka, Claus [MATH]" userId="3587954921_tp_box_2" providerId="OAuth2" clId="{3A5D34D3-13CC-588F-87D8-4157F9E149E9}" dt="2026-02-14T18:30:41.606" v="3623" actId="555"/>
-          <ac:spMkLst>
-            <pc:docMk/>
-            <pc:sldMk cId="3162223427" sldId="269"/>
-            <ac:spMk id="55" creationId="{8598C547-479B-5180-5D7B-0FFF61DFE239}"/>
-          </ac:spMkLst>
-        </pc:spChg>
-        <pc:spChg chg="mod">
-          <ac:chgData name="Kadelka, Claus [MATH]" userId="3587954921_tp_box_2" providerId="OAuth2" clId="{3A5D34D3-13CC-588F-87D8-4157F9E149E9}" dt="2026-02-14T18:30:41.606" v="3623" actId="555"/>
-          <ac:spMkLst>
-            <pc:docMk/>
-            <pc:sldMk cId="3162223427" sldId="269"/>
-            <ac:spMk id="56" creationId="{F0C64C76-D9EF-6A87-0C7D-42E0A292EF24}"/>
-          </ac:spMkLst>
-        </pc:spChg>
-        <pc:spChg chg="mod">
-          <ac:chgData name="Kadelka, Claus [MATH]" userId="3587954921_tp_box_2" providerId="OAuth2" clId="{3A5D34D3-13CC-588F-87D8-4157F9E149E9}" dt="2026-02-14T18:30:41.606" v="3623" actId="555"/>
-          <ac:spMkLst>
-            <pc:docMk/>
-            <pc:sldMk cId="3162223427" sldId="269"/>
-            <ac:spMk id="60" creationId="{08910065-785D-152B-2397-AEF3339E2453}"/>
-          </ac:spMkLst>
-        </pc:spChg>
-        <pc:spChg chg="mod">
-          <ac:chgData name="Kadelka, Claus [MATH]" userId="3587954921_tp_box_2" providerId="OAuth2" clId="{3A5D34D3-13CC-588F-87D8-4157F9E149E9}" dt="2026-02-14T18:30:41.606" v="3623" actId="555"/>
-          <ac:spMkLst>
-            <pc:docMk/>
-            <pc:sldMk cId="3162223427" sldId="269"/>
-            <ac:spMk id="62" creationId="{126B8307-9282-5407-F5DD-9F3424F89B25}"/>
-          </ac:spMkLst>
-        </pc:spChg>
-        <pc:spChg chg="mod">
-          <ac:chgData name="Kadelka, Claus [MATH]" userId="3587954921_tp_box_2" providerId="OAuth2" clId="{3A5D34D3-13CC-588F-87D8-4157F9E149E9}" dt="2026-02-14T18:30:41.606" v="3623" actId="555"/>
-          <ac:spMkLst>
-            <pc:docMk/>
-            <pc:sldMk cId="3162223427" sldId="269"/>
-            <ac:spMk id="63" creationId="{9C7CB346-79F3-6D54-98C8-7C8C562C9FD5}"/>
-          </ac:spMkLst>
-        </pc:spChg>
-        <pc:spChg chg="del mod">
-          <ac:chgData name="Kadelka, Claus [MATH]" userId="3587954921_tp_box_2" providerId="OAuth2" clId="{3A5D34D3-13CC-588F-87D8-4157F9E149E9}" dt="2026-02-15T04:27:16.098" v="3768" actId="478"/>
-          <ac:spMkLst>
-            <pc:docMk/>
-            <pc:sldMk cId="3162223427" sldId="269"/>
-            <ac:spMk id="65" creationId="{2C6FABD1-DE7F-99E6-C3BE-C376677413E8}"/>
-          </ac:spMkLst>
-        </pc:spChg>
-        <pc:spChg chg="del mod">
-          <ac:chgData name="Kadelka, Claus [MATH]" userId="3587954921_tp_box_2" providerId="OAuth2" clId="{3A5D34D3-13CC-588F-87D8-4157F9E149E9}" dt="2026-02-15T04:27:16.098" v="3768" actId="478"/>
-          <ac:spMkLst>
-            <pc:docMk/>
-            <pc:sldMk cId="3162223427" sldId="269"/>
-            <ac:spMk id="68" creationId="{FD6AAC02-EA95-C33A-2D21-4C3462843D1C}"/>
-          </ac:spMkLst>
-        </pc:spChg>
-        <pc:spChg chg="mod">
-          <ac:chgData name="Kadelka, Claus [MATH]" userId="3587954921_tp_box_2" providerId="OAuth2" clId="{3A5D34D3-13CC-588F-87D8-4157F9E149E9}" dt="2026-02-15T04:28:52.265" v="3779" actId="1076"/>
-          <ac:spMkLst>
-            <pc:docMk/>
-            <pc:sldMk cId="3162223427" sldId="269"/>
-            <ac:spMk id="69" creationId="{7C8B8A7B-878F-CF7F-E31B-6D3821A1A314}"/>
-          </ac:spMkLst>
-        </pc:spChg>
-        <pc:grpChg chg="mod">
-          <ac:chgData name="Kadelka, Claus [MATH]" userId="3587954921_tp_box_2" providerId="OAuth2" clId="{3A5D34D3-13CC-588F-87D8-4157F9E149E9}" dt="2026-02-15T00:18:11.889" v="3634" actId="1038"/>
-          <ac:grpSpMkLst>
-            <pc:docMk/>
-            <pc:sldMk cId="3162223427" sldId="269"/>
-            <ac:grpSpMk id="48" creationId="{4791505F-F5BE-5E96-FA79-F5B3726EEFF1}"/>
-          </ac:grpSpMkLst>
-        </pc:grpChg>
-        <pc:grpChg chg="mod">
-          <ac:chgData name="Kadelka, Claus [MATH]" userId="3587954921_tp_box_2" providerId="OAuth2" clId="{3A5D34D3-13CC-588F-87D8-4157F9E149E9}" dt="2026-02-14T18:28:00.025" v="3584" actId="1037"/>
-          <ac:grpSpMkLst>
-            <pc:docMk/>
-            <pc:sldMk cId="3162223427" sldId="269"/>
-            <ac:grpSpMk id="59" creationId="{36F3556B-48FB-1B00-0EFA-BC952FA012B7}"/>
-          </ac:grpSpMkLst>
-        </pc:grpChg>
-        <pc:picChg chg="mod">
-          <ac:chgData name="Kadelka, Claus [MATH]" userId="3587954921_tp_box_2" providerId="OAuth2" clId="{3A5D34D3-13CC-588F-87D8-4157F9E149E9}" dt="2026-02-15T00:18:16.358" v="3637" actId="1037"/>
-          <ac:picMkLst>
-            <pc:docMk/>
-            <pc:sldMk cId="3162223427" sldId="269"/>
-            <ac:picMk id="6" creationId="{5D7F8D4C-68A0-009E-C65D-72E7A4D3B0A6}"/>
-          </ac:picMkLst>
-        </pc:picChg>
-        <pc:picChg chg="add del mod">
-          <ac:chgData name="Kadelka, Claus [MATH]" userId="3587954921_tp_box_2" providerId="OAuth2" clId="{3A5D34D3-13CC-588F-87D8-4157F9E149E9}" dt="2026-02-15T04:27:57.420" v="3770" actId="478"/>
-          <ac:picMkLst>
-            <pc:docMk/>
-            <pc:sldMk cId="3162223427" sldId="269"/>
-            <ac:picMk id="7" creationId="{9EFA6167-2CC3-FD40-920B-7A7CFCE9A716}"/>
-          </ac:picMkLst>
-        </pc:picChg>
-        <pc:picChg chg="add mod modCrop">
-          <ac:chgData name="Kadelka, Claus [MATH]" userId="3587954921_tp_box_2" providerId="OAuth2" clId="{3A5D34D3-13CC-588F-87D8-4157F9E149E9}" dt="2026-02-15T04:28:46.512" v="3778" actId="1076"/>
-          <ac:picMkLst>
-            <pc:docMk/>
-            <pc:sldMk cId="3162223427" sldId="269"/>
-            <ac:picMk id="13" creationId="{6950CB7C-7B4E-B27A-913F-AD37BF6EDF83}"/>
-          </ac:picMkLst>
-        </pc:picChg>
-        <pc:picChg chg="mod">
-          <ac:chgData name="Kadelka, Claus [MATH]" userId="3587954921_tp_box_2" providerId="OAuth2" clId="{3A5D34D3-13CC-588F-87D8-4157F9E149E9}" dt="2026-02-14T18:30:00.496" v="3619" actId="1038"/>
-          <ac:picMkLst>
-            <pc:docMk/>
-            <pc:sldMk cId="3162223427" sldId="269"/>
-            <ac:picMk id="22" creationId="{A7814195-DAFB-B146-A8FA-B9CF176BAC8C}"/>
-          </ac:picMkLst>
-        </pc:picChg>
-        <pc:picChg chg="del mod">
-          <ac:chgData name="Kadelka, Claus [MATH]" userId="3587954921_tp_box_2" providerId="OAuth2" clId="{3A5D34D3-13CC-588F-87D8-4157F9E149E9}" dt="2026-02-15T04:27:16.098" v="3768" actId="478"/>
-          <ac:picMkLst>
-            <pc:docMk/>
-            <pc:sldMk cId="3162223427" sldId="269"/>
-            <ac:picMk id="43" creationId="{5E0B986D-2407-F0BD-6445-8041BB7752FA}"/>
-          </ac:picMkLst>
-        </pc:picChg>
-        <pc:picChg chg="mod">
-          <ac:chgData name="Kadelka, Claus [MATH]" userId="3587954921_tp_box_2" providerId="OAuth2" clId="{3A5D34D3-13CC-588F-87D8-4157F9E149E9}" dt="2026-02-15T04:29:12.280" v="3781" actId="1037"/>
-          <ac:picMkLst>
-            <pc:docMk/>
-            <pc:sldMk cId="3162223427" sldId="269"/>
-            <ac:picMk id="45" creationId="{2C6552EB-7F4D-96A1-041F-B14C6FEF543D}"/>
-          </ac:picMkLst>
-        </pc:picChg>
       </pc:sldChg>
     </pc:docChg>
   </pc:docChgLst>
@@ -1448,7 +406,7 @@
           <a:p>
             <a:fld id="{E9DBA412-2C90-714D-BAC1-13E9964E3BE1}" type="datetimeFigureOut">
               <a:rPr lang="en-US" smtClean="0"/>
-              <a:t>2/13/26</a:t>
+              <a:t>5/14/26</a:t>
             </a:fld>
             <a:endParaRPr lang="en-US"/>
           </a:p>
@@ -1759,7 +717,10 @@
           <a:bodyPr/>
           <a:lstStyle/>
           <a:p>
-            <a:endParaRPr lang="en-US" dirty="0"/>
+            <a:r>
+              <a:rPr lang="en-US" dirty="0"/>
+              <a:t>Original submission</a:t>
+            </a:r>
           </a:p>
         </p:txBody>
       </p:sp>
@@ -1780,7 +741,178 @@
           <a:p>
             <a:fld id="{C1B1E1C5-D11A-164E-ACBF-BFC252B2970F}" type="slidenum">
               <a:rPr lang="en-US" smtClean="0"/>
+              <a:t>10</a:t>
+            </a:fld>
+            <a:endParaRPr lang="en-US"/>
+          </a:p>
+        </p:txBody>
+      </p:sp>
+    </p:spTree>
+    <p:extLst>
+      <p:ext uri="{BB962C8B-B14F-4D97-AF65-F5344CB8AC3E}">
+        <p14:creationId xmlns:p14="http://schemas.microsoft.com/office/powerpoint/2010/main" val="102576083"/>
+      </p:ext>
+    </p:extLst>
+  </p:cSld>
+  <p:clrMapOvr>
+    <a:masterClrMapping/>
+  </p:clrMapOvr>
+</p:notes>
+</file>
+
+<file path=ppt/notesSlides/notesSlide2.xml><?xml version="1.0" encoding="utf-8"?>
+<p:notes xmlns:a="http://schemas.openxmlformats.org/drawingml/2006/main" xmlns:r="http://schemas.openxmlformats.org/officeDocument/2006/relationships" xmlns:p="http://schemas.openxmlformats.org/presentationml/2006/main">
+  <p:cSld>
+    <p:spTree>
+      <p:nvGrpSpPr>
+        <p:cNvPr id="1" name=""/>
+        <p:cNvGrpSpPr/>
+        <p:nvPr/>
+      </p:nvGrpSpPr>
+      <p:grpSpPr>
+        <a:xfrm>
+          <a:off x="0" y="0"/>
+          <a:ext cx="0" cy="0"/>
+          <a:chOff x="0" y="0"/>
+          <a:chExt cx="0" cy="0"/>
+        </a:xfrm>
+      </p:grpSpPr>
+      <p:sp>
+        <p:nvSpPr>
+          <p:cNvPr id="2" name="Slide Image Placeholder 1"/>
+          <p:cNvSpPr>
+            <a:spLocks noGrp="1" noRot="1" noChangeAspect="1"/>
+          </p:cNvSpPr>
+          <p:nvPr>
+            <p:ph type="sldImg"/>
+          </p:nvPr>
+        </p:nvSpPr>
+        <p:spPr/>
+      </p:sp>
+      <p:sp>
+        <p:nvSpPr>
+          <p:cNvPr id="3" name="Notes Placeholder 2"/>
+          <p:cNvSpPr>
+            <a:spLocks noGrp="1"/>
+          </p:cNvSpPr>
+          <p:nvPr>
+            <p:ph type="body" idx="1"/>
+          </p:nvPr>
+        </p:nvSpPr>
+        <p:spPr/>
+        <p:txBody>
+          <a:bodyPr/>
+          <a:lstStyle/>
+          <a:p>
+            <a:r>
+              <a:rPr lang="en-US" dirty="0"/>
+              <a:t>New for revision</a:t>
+            </a:r>
+          </a:p>
+        </p:txBody>
+      </p:sp>
+      <p:sp>
+        <p:nvSpPr>
+          <p:cNvPr id="4" name="Slide Number Placeholder 3"/>
+          <p:cNvSpPr>
+            <a:spLocks noGrp="1"/>
+          </p:cNvSpPr>
+          <p:nvPr>
+            <p:ph type="sldNum" sz="quarter" idx="5"/>
+          </p:nvPr>
+        </p:nvSpPr>
+        <p:spPr/>
+        <p:txBody>
+          <a:bodyPr/>
+          <a:lstStyle/>
+          <a:p>
+            <a:fld id="{C1B1E1C5-D11A-164E-ACBF-BFC252B2970F}" type="slidenum">
+              <a:rPr lang="en-US" smtClean="0"/>
               <a:t>11</a:t>
+            </a:fld>
+            <a:endParaRPr lang="en-US"/>
+          </a:p>
+        </p:txBody>
+      </p:sp>
+    </p:spTree>
+    <p:extLst>
+      <p:ext uri="{BB962C8B-B14F-4D97-AF65-F5344CB8AC3E}">
+        <p14:creationId xmlns:p14="http://schemas.microsoft.com/office/powerpoint/2010/main" val="879008741"/>
+      </p:ext>
+    </p:extLst>
+  </p:cSld>
+  <p:clrMapOvr>
+    <a:masterClrMapping/>
+  </p:clrMapOvr>
+</p:notes>
+</file>
+
+<file path=ppt/notesSlides/notesSlide3.xml><?xml version="1.0" encoding="utf-8"?>
+<p:notes xmlns:a="http://schemas.openxmlformats.org/drawingml/2006/main" xmlns:r="http://schemas.openxmlformats.org/officeDocument/2006/relationships" xmlns:p="http://schemas.openxmlformats.org/presentationml/2006/main">
+  <p:cSld>
+    <p:spTree>
+      <p:nvGrpSpPr>
+        <p:cNvPr id="1" name=""/>
+        <p:cNvGrpSpPr/>
+        <p:nvPr/>
+      </p:nvGrpSpPr>
+      <p:grpSpPr>
+        <a:xfrm>
+          <a:off x="0" y="0"/>
+          <a:ext cx="0" cy="0"/>
+          <a:chOff x="0" y="0"/>
+          <a:chExt cx="0" cy="0"/>
+        </a:xfrm>
+      </p:grpSpPr>
+      <p:sp>
+        <p:nvSpPr>
+          <p:cNvPr id="2" name="Slide Image Placeholder 1"/>
+          <p:cNvSpPr>
+            <a:spLocks noGrp="1" noRot="1" noChangeAspect="1"/>
+          </p:cNvSpPr>
+          <p:nvPr>
+            <p:ph type="sldImg"/>
+          </p:nvPr>
+        </p:nvSpPr>
+        <p:spPr/>
+      </p:sp>
+      <p:sp>
+        <p:nvSpPr>
+          <p:cNvPr id="3" name="Notes Placeholder 2"/>
+          <p:cNvSpPr>
+            <a:spLocks noGrp="1"/>
+          </p:cNvSpPr>
+          <p:nvPr>
+            <p:ph type="body" idx="1"/>
+          </p:nvPr>
+        </p:nvSpPr>
+        <p:spPr/>
+        <p:txBody>
+          <a:bodyPr/>
+          <a:lstStyle/>
+          <a:p>
+            <a:endParaRPr lang="en-US" dirty="0"/>
+          </a:p>
+        </p:txBody>
+      </p:sp>
+      <p:sp>
+        <p:nvSpPr>
+          <p:cNvPr id="4" name="Slide Number Placeholder 3"/>
+          <p:cNvSpPr>
+            <a:spLocks noGrp="1"/>
+          </p:cNvSpPr>
+          <p:nvPr>
+            <p:ph type="sldNum" sz="quarter" idx="5"/>
+          </p:nvPr>
+        </p:nvSpPr>
+        <p:spPr/>
+        <p:txBody>
+          <a:bodyPr/>
+          <a:lstStyle/>
+          <a:p>
+            <a:fld id="{C1B1E1C5-D11A-164E-ACBF-BFC252B2970F}" type="slidenum">
+              <a:rPr lang="en-US" smtClean="0"/>
+              <a:t>12</a:t>
             </a:fld>
             <a:endParaRPr lang="en-US"/>
           </a:p>
@@ -1799,7 +931,7 @@
 </p:notes>
 </file>
 
-<file path=ppt/notesSlides/notesSlide2.xml><?xml version="1.0" encoding="utf-8"?>
+<file path=ppt/notesSlides/notesSlide4.xml><?xml version="1.0" encoding="utf-8"?>
 <p:notes xmlns:a="http://schemas.openxmlformats.org/drawingml/2006/main" xmlns:r="http://schemas.openxmlformats.org/officeDocument/2006/relationships" xmlns:p="http://schemas.openxmlformats.org/presentationml/2006/main">
   <p:cSld>
     <p:spTree>
@@ -1888,7 +1020,7 @@
           <a:p>
             <a:fld id="{C1B1E1C5-D11A-164E-ACBF-BFC252B2970F}" type="slidenum">
               <a:rPr lang="en-US" smtClean="0"/>
-              <a:t>12</a:t>
+              <a:t>13</a:t>
             </a:fld>
             <a:endParaRPr lang="en-US"/>
           </a:p>
@@ -2054,7 +1186,7 @@
           <a:p>
             <a:fld id="{ABBB5E58-55BA-1E41-8676-D73EB213C571}" type="datetimeFigureOut">
               <a:rPr lang="en-US" smtClean="0"/>
-              <a:t>2/9/26</a:t>
+              <a:t>5/14/26</a:t>
             </a:fld>
             <a:endParaRPr lang="en-US"/>
           </a:p>
@@ -2252,7 +1384,7 @@
           <a:p>
             <a:fld id="{ABBB5E58-55BA-1E41-8676-D73EB213C571}" type="datetimeFigureOut">
               <a:rPr lang="en-US" smtClean="0"/>
-              <a:t>2/9/26</a:t>
+              <a:t>5/14/26</a:t>
             </a:fld>
             <a:endParaRPr lang="en-US"/>
           </a:p>
@@ -2460,7 +1592,7 @@
           <a:p>
             <a:fld id="{ABBB5E58-55BA-1E41-8676-D73EB213C571}" type="datetimeFigureOut">
               <a:rPr lang="en-US" smtClean="0"/>
-              <a:t>2/9/26</a:t>
+              <a:t>5/14/26</a:t>
             </a:fld>
             <a:endParaRPr lang="en-US"/>
           </a:p>
@@ -2658,7 +1790,7 @@
           <a:p>
             <a:fld id="{ABBB5E58-55BA-1E41-8676-D73EB213C571}" type="datetimeFigureOut">
               <a:rPr lang="en-US" smtClean="0"/>
-              <a:t>2/9/26</a:t>
+              <a:t>5/14/26</a:t>
             </a:fld>
             <a:endParaRPr lang="en-US"/>
           </a:p>
@@ -2933,7 +2065,7 @@
           <a:p>
             <a:fld id="{ABBB5E58-55BA-1E41-8676-D73EB213C571}" type="datetimeFigureOut">
               <a:rPr lang="en-US" smtClean="0"/>
-              <a:t>2/9/26</a:t>
+              <a:t>5/14/26</a:t>
             </a:fld>
             <a:endParaRPr lang="en-US"/>
           </a:p>
@@ -3198,7 +2330,7 @@
           <a:p>
             <a:fld id="{ABBB5E58-55BA-1E41-8676-D73EB213C571}" type="datetimeFigureOut">
               <a:rPr lang="en-US" smtClean="0"/>
-              <a:t>2/9/26</a:t>
+              <a:t>5/14/26</a:t>
             </a:fld>
             <a:endParaRPr lang="en-US"/>
           </a:p>
@@ -3610,7 +2742,7 @@
           <a:p>
             <a:fld id="{ABBB5E58-55BA-1E41-8676-D73EB213C571}" type="datetimeFigureOut">
               <a:rPr lang="en-US" smtClean="0"/>
-              <a:t>2/9/26</a:t>
+              <a:t>5/14/26</a:t>
             </a:fld>
             <a:endParaRPr lang="en-US"/>
           </a:p>
@@ -3751,7 +2883,7 @@
           <a:p>
             <a:fld id="{ABBB5E58-55BA-1E41-8676-D73EB213C571}" type="datetimeFigureOut">
               <a:rPr lang="en-US" smtClean="0"/>
-              <a:t>2/9/26</a:t>
+              <a:t>5/14/26</a:t>
             </a:fld>
             <a:endParaRPr lang="en-US"/>
           </a:p>
@@ -3864,7 +2996,7 @@
           <a:p>
             <a:fld id="{ABBB5E58-55BA-1E41-8676-D73EB213C571}" type="datetimeFigureOut">
               <a:rPr lang="en-US" smtClean="0"/>
-              <a:t>2/9/26</a:t>
+              <a:t>5/14/26</a:t>
             </a:fld>
             <a:endParaRPr lang="en-US"/>
           </a:p>
@@ -4175,7 +3307,7 @@
           <a:p>
             <a:fld id="{ABBB5E58-55BA-1E41-8676-D73EB213C571}" type="datetimeFigureOut">
               <a:rPr lang="en-US" smtClean="0"/>
-              <a:t>2/9/26</a:t>
+              <a:t>5/14/26</a:t>
             </a:fld>
             <a:endParaRPr lang="en-US"/>
           </a:p>
@@ -4463,7 +3595,7 @@
           <a:p>
             <a:fld id="{ABBB5E58-55BA-1E41-8676-D73EB213C571}" type="datetimeFigureOut">
               <a:rPr lang="en-US" smtClean="0"/>
-              <a:t>2/9/26</a:t>
+              <a:t>5/14/26</a:t>
             </a:fld>
             <a:endParaRPr lang="en-US"/>
           </a:p>
@@ -4704,7 +3836,7 @@
           <a:p>
             <a:fld id="{ABBB5E58-55BA-1E41-8676-D73EB213C571}" type="datetimeFigureOut">
               <a:rPr lang="en-US" smtClean="0"/>
-              <a:t>2/9/26</a:t>
+              <a:t>5/14/26</a:t>
             </a:fld>
             <a:endParaRPr lang="en-US"/>
           </a:p>
@@ -6201,6 +5333,666 @@
 </file>
 
 <file path=ppt/slides/slide11.xml><?xml version="1.0" encoding="utf-8"?>
+<p:sld xmlns:a="http://schemas.openxmlformats.org/drawingml/2006/main" xmlns:r="http://schemas.openxmlformats.org/officeDocument/2006/relationships" xmlns:p="http://schemas.openxmlformats.org/presentationml/2006/main">
+  <p:cSld>
+    <p:spTree>
+      <p:nvGrpSpPr>
+        <p:cNvPr id="1" name="">
+          <a:extLst>
+            <a:ext uri="{FF2B5EF4-FFF2-40B4-BE49-F238E27FC236}">
+              <a16:creationId xmlns:a16="http://schemas.microsoft.com/office/drawing/2014/main" id="{1DF0A55B-B4D7-EA6D-FC93-36266B78B733}"/>
+            </a:ext>
+          </a:extLst>
+        </p:cNvPr>
+        <p:cNvGrpSpPr/>
+        <p:nvPr/>
+      </p:nvGrpSpPr>
+      <p:grpSpPr>
+        <a:xfrm>
+          <a:off x="0" y="0"/>
+          <a:ext cx="0" cy="0"/>
+          <a:chOff x="0" y="0"/>
+          <a:chExt cx="0" cy="0"/>
+        </a:xfrm>
+      </p:grpSpPr>
+      <p:sp>
+        <p:nvSpPr>
+          <p:cNvPr id="2" name="TextBox 1">
+            <a:extLst>
+              <a:ext uri="{FF2B5EF4-FFF2-40B4-BE49-F238E27FC236}">
+                <a16:creationId xmlns:a16="http://schemas.microsoft.com/office/drawing/2014/main" id="{FC30D08E-44AE-D0A2-1AF4-8A2281AA45A1}"/>
+              </a:ext>
+            </a:extLst>
+          </p:cNvPr>
+          <p:cNvSpPr txBox="1"/>
+          <p:nvPr/>
+        </p:nvSpPr>
+        <p:spPr>
+          <a:xfrm>
+            <a:off x="2464890" y="1429795"/>
+            <a:ext cx="2931569" cy="1140143"/>
+          </a:xfrm>
+          <a:prstGeom prst="roundRect">
+            <a:avLst>
+              <a:gd name="adj" fmla="val 5071"/>
+            </a:avLst>
+          </a:prstGeom>
+          <a:noFill/>
+        </p:spPr>
+        <p:style>
+          <a:lnRef idx="2">
+            <a:schemeClr val="accent1"/>
+          </a:lnRef>
+          <a:fillRef idx="1">
+            <a:schemeClr val="lt1"/>
+          </a:fillRef>
+          <a:effectRef idx="0">
+            <a:schemeClr val="accent1"/>
+          </a:effectRef>
+          <a:fontRef idx="minor">
+            <a:schemeClr val="dk1"/>
+          </a:fontRef>
+        </p:style>
+        <p:txBody>
+          <a:bodyPr wrap="square" rtlCol="0">
+            <a:spAutoFit/>
+          </a:bodyPr>
+          <a:lstStyle/>
+          <a:p>
+            <a:r>
+              <a:rPr lang="en-US" sz="1000" b="1" dirty="0"/>
+              <a:t>User Input</a:t>
+            </a:r>
+          </a:p>
+          <a:p>
+            <a:pPr marL="171450" indent="-171450">
+              <a:buFont typeface="Wingdings" pitchFamily="2" charset="2"/>
+              <a:buChar char="v"/>
+            </a:pPr>
+            <a:r>
+              <a:rPr lang="en-US" sz="800" b="1" dirty="0"/>
+              <a:t>Random network design</a:t>
+            </a:r>
+            <a:br>
+              <a:rPr lang="en-US" sz="800" b="1" dirty="0"/>
+            </a:br>
+            <a:r>
+              <a:rPr lang="en-US" sz="800" dirty="0"/>
+              <a:t>Specify network size, topological constraints (in-degree distribution, self-loops, strong connectivity, …), functional constraints (canalizing depth, layer structure, bias, …)</a:t>
+            </a:r>
+          </a:p>
+          <a:p>
+            <a:pPr marL="171450" indent="-171450">
+              <a:buFont typeface="Wingdings" pitchFamily="2" charset="2"/>
+              <a:buChar char="v"/>
+            </a:pPr>
+            <a:r>
+              <a:rPr lang="en-US" sz="800" b="1" dirty="0"/>
+              <a:t>Biological network for matched null models</a:t>
+            </a:r>
+            <a:br>
+              <a:rPr lang="en-US" sz="800" b="1" dirty="0"/>
+            </a:br>
+            <a:r>
+              <a:rPr lang="en-US" sz="800" dirty="0"/>
+              <a:t>Decide whether to preserve full wiring diagram, in- and/or out-degree distribution, canalizing depth, bias, …</a:t>
+            </a:r>
+          </a:p>
+        </p:txBody>
+      </p:sp>
+      <p:sp>
+        <p:nvSpPr>
+          <p:cNvPr id="17" name="TextBox 16">
+            <a:extLst>
+              <a:ext uri="{FF2B5EF4-FFF2-40B4-BE49-F238E27FC236}">
+                <a16:creationId xmlns:a16="http://schemas.microsoft.com/office/drawing/2014/main" id="{DCE14F3E-CB16-C533-3B63-D46FB2C17C1D}"/>
+              </a:ext>
+            </a:extLst>
+          </p:cNvPr>
+          <p:cNvSpPr txBox="1"/>
+          <p:nvPr/>
+        </p:nvSpPr>
+        <p:spPr>
+          <a:xfrm>
+            <a:off x="5672350" y="1429795"/>
+            <a:ext cx="2931557" cy="1380411"/>
+          </a:xfrm>
+          <a:prstGeom prst="roundRect">
+            <a:avLst>
+              <a:gd name="adj" fmla="val 3851"/>
+            </a:avLst>
+          </a:prstGeom>
+          <a:noFill/>
+        </p:spPr>
+        <p:style>
+          <a:lnRef idx="2">
+            <a:schemeClr val="accent1"/>
+          </a:lnRef>
+          <a:fillRef idx="1">
+            <a:schemeClr val="lt1"/>
+          </a:fillRef>
+          <a:effectRef idx="0">
+            <a:schemeClr val="accent1"/>
+          </a:effectRef>
+          <a:fontRef idx="minor">
+            <a:schemeClr val="dk1"/>
+          </a:fontRef>
+        </p:style>
+        <p:txBody>
+          <a:bodyPr wrap="square" rtlCol="0">
+            <a:spAutoFit/>
+          </a:bodyPr>
+          <a:lstStyle/>
+          <a:p>
+            <a:r>
+              <a:rPr lang="en-US" sz="1000" b="1" dirty="0"/>
+              <a:t>Controlled Generation</a:t>
+            </a:r>
+            <a:r>
+              <a:rPr lang="en-US" sz="800" dirty="0"/>
+              <a:t> </a:t>
+            </a:r>
+          </a:p>
+          <a:p>
+            <a:pPr marL="171450" indent="-171450">
+              <a:buFont typeface="Wingdings" pitchFamily="2" charset="2"/>
+              <a:buChar char="v"/>
+            </a:pPr>
+            <a:r>
+              <a:rPr lang="en-US" sz="800" b="1" dirty="0"/>
+              <a:t>Boolean Function Generators </a:t>
+            </a:r>
+            <a:br>
+              <a:rPr lang="en-US" sz="800" dirty="0"/>
+            </a:br>
+            <a:r>
+              <a:rPr lang="en-US" sz="800" dirty="0"/>
+              <a:t>Function-uniform sampling under constraints:</a:t>
+            </a:r>
+            <a:br>
+              <a:rPr lang="en-US" sz="800" dirty="0"/>
+            </a:br>
+            <a:r>
+              <a:rPr lang="en-US" sz="800" dirty="0"/>
+              <a:t>canalizing depth, layer structure, bias, ...</a:t>
+            </a:r>
+          </a:p>
+          <a:p>
+            <a:pPr marL="171450" indent="-171450">
+              <a:buFont typeface="Wingdings" pitchFamily="2" charset="2"/>
+              <a:buChar char="v"/>
+            </a:pPr>
+            <a:r>
+              <a:rPr lang="en-US" sz="800" b="1" dirty="0"/>
+              <a:t>Boolean Network Generators</a:t>
+            </a:r>
+            <a:br>
+              <a:rPr lang="en-US" sz="800" dirty="0"/>
+            </a:br>
+            <a:r>
+              <a:rPr lang="en-US" sz="800" dirty="0"/>
+              <a:t>Controlled topology and update-rule ensembles:</a:t>
+            </a:r>
+            <a:br>
+              <a:rPr lang="en-US" sz="800" dirty="0"/>
+            </a:br>
+            <a:r>
+              <a:rPr lang="en-US" sz="800" dirty="0"/>
+              <a:t>degree distribution, function-level constraints</a:t>
+            </a:r>
+          </a:p>
+          <a:p>
+            <a:pPr marL="171450" indent="-171450">
+              <a:buFont typeface="Wingdings" pitchFamily="2" charset="2"/>
+              <a:buChar char="v"/>
+            </a:pPr>
+            <a:r>
+              <a:rPr lang="en-US" sz="800" b="1" dirty="0"/>
+              <a:t>Matched null-model generators</a:t>
+            </a:r>
+            <a:br>
+              <a:rPr lang="en-US" sz="800" b="1" dirty="0"/>
+            </a:br>
+            <a:r>
+              <a:rPr lang="en-US" sz="800" dirty="0"/>
+              <a:t>Preserve selected biological features while randomizing remaining network properties</a:t>
+            </a:r>
+            <a:endParaRPr lang="en-US" sz="800" b="1" dirty="0"/>
+          </a:p>
+        </p:txBody>
+      </p:sp>
+      <p:sp>
+        <p:nvSpPr>
+          <p:cNvPr id="18" name="TextBox 17">
+            <a:extLst>
+              <a:ext uri="{FF2B5EF4-FFF2-40B4-BE49-F238E27FC236}">
+                <a16:creationId xmlns:a16="http://schemas.microsoft.com/office/drawing/2014/main" id="{895D657E-674E-54F6-3B4C-5AE3527EB8EF}"/>
+              </a:ext>
+            </a:extLst>
+          </p:cNvPr>
+          <p:cNvSpPr txBox="1"/>
+          <p:nvPr/>
+        </p:nvSpPr>
+        <p:spPr>
+          <a:xfrm>
+            <a:off x="5657161" y="3109306"/>
+            <a:ext cx="2935224" cy="1254919"/>
+          </a:xfrm>
+          <a:prstGeom prst="roundRect">
+            <a:avLst>
+              <a:gd name="adj" fmla="val 4583"/>
+            </a:avLst>
+          </a:prstGeom>
+          <a:noFill/>
+        </p:spPr>
+        <p:style>
+          <a:lnRef idx="2">
+            <a:schemeClr val="accent1"/>
+          </a:lnRef>
+          <a:fillRef idx="1">
+            <a:schemeClr val="lt1"/>
+          </a:fillRef>
+          <a:effectRef idx="0">
+            <a:schemeClr val="accent1"/>
+          </a:effectRef>
+          <a:fontRef idx="minor">
+            <a:schemeClr val="dk1"/>
+          </a:fontRef>
+        </p:style>
+        <p:txBody>
+          <a:bodyPr wrap="square" rtlCol="0">
+            <a:spAutoFit/>
+          </a:bodyPr>
+          <a:lstStyle/>
+          <a:p>
+            <a:r>
+              <a:rPr lang="en-US" sz="1000" b="1" dirty="0"/>
+              <a:t>Analysis</a:t>
+            </a:r>
+            <a:r>
+              <a:rPr lang="en-US" sz="800" dirty="0"/>
+              <a:t> </a:t>
+            </a:r>
+          </a:p>
+          <a:p>
+            <a:pPr marL="171450" indent="-171450">
+              <a:buFont typeface="Wingdings" pitchFamily="2" charset="2"/>
+              <a:buChar char="v"/>
+            </a:pPr>
+            <a:r>
+              <a:rPr lang="en-US" sz="800" b="1" dirty="0"/>
+              <a:t>Function-level analysis </a:t>
+            </a:r>
+            <a:br>
+              <a:rPr lang="en-US" sz="800" dirty="0"/>
+            </a:br>
+            <a:r>
+              <a:rPr lang="en-US" sz="800" dirty="0"/>
+              <a:t>canalization, collective canalization, redundancy, symmetry, sensitivity, monotonicity, …</a:t>
+            </a:r>
+          </a:p>
+          <a:p>
+            <a:pPr marL="171450" indent="-171450">
+              <a:buFont typeface="Wingdings" pitchFamily="2" charset="2"/>
+              <a:buChar char="v"/>
+            </a:pPr>
+            <a:r>
+              <a:rPr lang="en-US" sz="800" b="1" dirty="0"/>
+              <a:t>Network structure analysis </a:t>
+            </a:r>
+            <a:br>
+              <a:rPr lang="en-US" sz="800" dirty="0"/>
+            </a:br>
+            <a:r>
+              <a:rPr lang="en-US" sz="800" dirty="0"/>
+              <a:t>feedback and feed-forward loops, modularity, …</a:t>
+            </a:r>
+          </a:p>
+          <a:p>
+            <a:pPr marL="171450" indent="-171450">
+              <a:buFont typeface="Wingdings" pitchFamily="2" charset="2"/>
+              <a:buChar char="v"/>
+            </a:pPr>
+            <a:r>
+              <a:rPr lang="en-US" sz="800" b="1" dirty="0"/>
+              <a:t>Dynamical analysis</a:t>
+            </a:r>
+            <a:br>
+              <a:rPr lang="en-US" sz="800" dirty="0"/>
+            </a:br>
+            <a:r>
+              <a:rPr lang="en-US" sz="800" dirty="0"/>
+              <a:t>attractors, full trajectories, basin entropy, Derrida values, coherence, perturbation fragility, …</a:t>
+            </a:r>
+          </a:p>
+        </p:txBody>
+      </p:sp>
+      <p:sp>
+        <p:nvSpPr>
+          <p:cNvPr id="19" name="TextBox 18">
+            <a:extLst>
+              <a:ext uri="{FF2B5EF4-FFF2-40B4-BE49-F238E27FC236}">
+                <a16:creationId xmlns:a16="http://schemas.microsoft.com/office/drawing/2014/main" id="{1F02FE9E-4FD2-F921-5BA0-18BE9218DF83}"/>
+              </a:ext>
+            </a:extLst>
+          </p:cNvPr>
+          <p:cNvSpPr txBox="1"/>
+          <p:nvPr/>
+        </p:nvSpPr>
+        <p:spPr>
+          <a:xfrm>
+            <a:off x="2464895" y="2752690"/>
+            <a:ext cx="2931557" cy="1615916"/>
+          </a:xfrm>
+          <a:prstGeom prst="roundRect">
+            <a:avLst>
+              <a:gd name="adj" fmla="val 3240"/>
+            </a:avLst>
+          </a:prstGeom>
+          <a:noFill/>
+        </p:spPr>
+        <p:style>
+          <a:lnRef idx="2">
+            <a:schemeClr val="accent1"/>
+          </a:lnRef>
+          <a:fillRef idx="1">
+            <a:schemeClr val="lt1"/>
+          </a:fillRef>
+          <a:effectRef idx="0">
+            <a:schemeClr val="accent1"/>
+          </a:effectRef>
+          <a:fontRef idx="minor">
+            <a:schemeClr val="dk1"/>
+          </a:fontRef>
+        </p:style>
+        <p:txBody>
+          <a:bodyPr wrap="square" rtlCol="0">
+            <a:spAutoFit/>
+          </a:bodyPr>
+          <a:lstStyle/>
+          <a:p>
+            <a:r>
+              <a:rPr lang="en-US" sz="1000" b="1" dirty="0"/>
+              <a:t>Ensemble-based investigations</a:t>
+            </a:r>
+          </a:p>
+          <a:p>
+            <a:pPr marL="171450" indent="-171450">
+              <a:buFont typeface="Wingdings" pitchFamily="2" charset="2"/>
+              <a:buChar char="v"/>
+            </a:pPr>
+            <a:r>
+              <a:rPr lang="en-US" sz="800" b="1" dirty="0"/>
+              <a:t>Function-level characterization (Fig. 3A)</a:t>
+            </a:r>
+            <a:br>
+              <a:rPr lang="en-US" sz="800" dirty="0"/>
+            </a:br>
+            <a:r>
+              <a:rPr lang="en-US" sz="800" dirty="0"/>
+              <a:t>Compare 5,000+ biological Boolean functions with constraint-matched random ensembles to uncover structural design principles</a:t>
+            </a:r>
+          </a:p>
+          <a:p>
+            <a:pPr marL="171450" indent="-171450">
+              <a:buFont typeface="Wingdings" pitchFamily="2" charset="2"/>
+              <a:buChar char="v"/>
+            </a:pPr>
+            <a:r>
+              <a:rPr lang="en-US" sz="800" b="1" dirty="0"/>
+              <a:t>Parameter space exploration (Fig. 3B)</a:t>
+            </a:r>
+            <a:br>
+              <a:rPr lang="en-US" sz="800" dirty="0"/>
+            </a:br>
+            <a:r>
+              <a:rPr lang="en-US" sz="800" dirty="0"/>
+              <a:t>Systematically quantify how functional and topological parameters shape network dynamics and robustness</a:t>
+            </a:r>
+          </a:p>
+          <a:p>
+            <a:pPr marL="171450" indent="-171450">
+              <a:buFont typeface="Wingdings" pitchFamily="2" charset="2"/>
+              <a:buChar char="v"/>
+            </a:pPr>
+            <a:r>
+              <a:rPr lang="en-US" sz="800" b="1" dirty="0"/>
+              <a:t>Null model hypothesis testing (Fig. 3C)</a:t>
+            </a:r>
+            <a:br>
+              <a:rPr lang="en-US" sz="800" dirty="0"/>
+            </a:br>
+            <a:r>
+              <a:rPr lang="en-US" sz="800" dirty="0"/>
+              <a:t>Assess the statistical significance of structural and dynamical features in biological networks using ensembles of matched null models</a:t>
+            </a:r>
+          </a:p>
+        </p:txBody>
+      </p:sp>
+      <p:cxnSp>
+        <p:nvCxnSpPr>
+          <p:cNvPr id="20" name="Straight Arrow Connector 19">
+            <a:extLst>
+              <a:ext uri="{FF2B5EF4-FFF2-40B4-BE49-F238E27FC236}">
+                <a16:creationId xmlns:a16="http://schemas.microsoft.com/office/drawing/2014/main" id="{21035FF3-B2F8-1970-41DC-0EC573D38B69}"/>
+              </a:ext>
+            </a:extLst>
+          </p:cNvPr>
+          <p:cNvCxnSpPr>
+            <a:cxnSpLocks/>
+            <a:stCxn id="2" idx="3"/>
+          </p:cNvCxnSpPr>
+          <p:nvPr/>
+        </p:nvCxnSpPr>
+        <p:spPr>
+          <a:xfrm flipV="1">
+            <a:off x="5396459" y="1987579"/>
+            <a:ext cx="260702" cy="12288"/>
+          </a:xfrm>
+          <a:prstGeom prst="straightConnector1">
+            <a:avLst/>
+          </a:prstGeom>
+          <a:ln>
+            <a:tailEnd type="triangle" w="lg" len="lg"/>
+          </a:ln>
+        </p:spPr>
+        <p:style>
+          <a:lnRef idx="2">
+            <a:schemeClr val="accent1"/>
+          </a:lnRef>
+          <a:fillRef idx="0">
+            <a:schemeClr val="accent1"/>
+          </a:fillRef>
+          <a:effectRef idx="1">
+            <a:schemeClr val="accent1"/>
+          </a:effectRef>
+          <a:fontRef idx="minor">
+            <a:schemeClr val="tx1"/>
+          </a:fontRef>
+        </p:style>
+      </p:cxnSp>
+      <p:cxnSp>
+        <p:nvCxnSpPr>
+          <p:cNvPr id="24" name="Straight Arrow Connector 23">
+            <a:extLst>
+              <a:ext uri="{FF2B5EF4-FFF2-40B4-BE49-F238E27FC236}">
+                <a16:creationId xmlns:a16="http://schemas.microsoft.com/office/drawing/2014/main" id="{EF67EF4C-4E39-E91C-F453-CC39F99ABB1D}"/>
+              </a:ext>
+            </a:extLst>
+          </p:cNvPr>
+          <p:cNvCxnSpPr>
+            <a:cxnSpLocks/>
+          </p:cNvCxnSpPr>
+          <p:nvPr/>
+        </p:nvCxnSpPr>
+        <p:spPr>
+          <a:xfrm>
+            <a:off x="6959631" y="2798758"/>
+            <a:ext cx="0" cy="310548"/>
+          </a:xfrm>
+          <a:prstGeom prst="straightConnector1">
+            <a:avLst/>
+          </a:prstGeom>
+          <a:ln>
+            <a:tailEnd type="triangle" w="lg" len="lg"/>
+          </a:ln>
+        </p:spPr>
+        <p:style>
+          <a:lnRef idx="2">
+            <a:schemeClr val="accent1"/>
+          </a:lnRef>
+          <a:fillRef idx="0">
+            <a:schemeClr val="accent1"/>
+          </a:fillRef>
+          <a:effectRef idx="1">
+            <a:schemeClr val="accent1"/>
+          </a:effectRef>
+          <a:fontRef idx="minor">
+            <a:schemeClr val="tx1"/>
+          </a:fontRef>
+        </p:style>
+      </p:cxnSp>
+      <p:cxnSp>
+        <p:nvCxnSpPr>
+          <p:cNvPr id="29" name="Straight Arrow Connector 28">
+            <a:extLst>
+              <a:ext uri="{FF2B5EF4-FFF2-40B4-BE49-F238E27FC236}">
+                <a16:creationId xmlns:a16="http://schemas.microsoft.com/office/drawing/2014/main" id="{115EB058-C45B-FB02-3C97-D78E7C1821CB}"/>
+              </a:ext>
+            </a:extLst>
+          </p:cNvPr>
+          <p:cNvCxnSpPr>
+            <a:cxnSpLocks/>
+            <a:stCxn id="18" idx="1"/>
+          </p:cNvCxnSpPr>
+          <p:nvPr/>
+        </p:nvCxnSpPr>
+        <p:spPr>
+          <a:xfrm flipH="1" flipV="1">
+            <a:off x="5394934" y="3726526"/>
+            <a:ext cx="262227" cy="10240"/>
+          </a:xfrm>
+          <a:prstGeom prst="straightConnector1">
+            <a:avLst/>
+          </a:prstGeom>
+          <a:ln>
+            <a:tailEnd type="triangle" w="lg" len="lg"/>
+          </a:ln>
+        </p:spPr>
+        <p:style>
+          <a:lnRef idx="2">
+            <a:schemeClr val="accent1"/>
+          </a:lnRef>
+          <a:fillRef idx="0">
+            <a:schemeClr val="accent1"/>
+          </a:fillRef>
+          <a:effectRef idx="1">
+            <a:schemeClr val="accent1"/>
+          </a:effectRef>
+          <a:fontRef idx="minor">
+            <a:schemeClr val="tx1"/>
+          </a:fontRef>
+        </p:style>
+      </p:cxnSp>
+      <p:cxnSp>
+        <p:nvCxnSpPr>
+          <p:cNvPr id="30" name="Straight Arrow Connector 29">
+            <a:extLst>
+              <a:ext uri="{FF2B5EF4-FFF2-40B4-BE49-F238E27FC236}">
+                <a16:creationId xmlns:a16="http://schemas.microsoft.com/office/drawing/2014/main" id="{2025B2D3-15E3-475D-A8AE-69940803CA2C}"/>
+              </a:ext>
+            </a:extLst>
+          </p:cNvPr>
+          <p:cNvCxnSpPr>
+            <a:cxnSpLocks/>
+          </p:cNvCxnSpPr>
+          <p:nvPr/>
+        </p:nvCxnSpPr>
+        <p:spPr>
+          <a:xfrm flipV="1">
+            <a:off x="7295211" y="2801395"/>
+            <a:ext cx="0" cy="317058"/>
+          </a:xfrm>
+          <a:prstGeom prst="straightConnector1">
+            <a:avLst/>
+          </a:prstGeom>
+          <a:ln>
+            <a:tailEnd type="triangle" w="lg" len="lg"/>
+          </a:ln>
+        </p:spPr>
+        <p:style>
+          <a:lnRef idx="2">
+            <a:schemeClr val="accent1"/>
+          </a:lnRef>
+          <a:fillRef idx="0">
+            <a:schemeClr val="accent1"/>
+          </a:fillRef>
+          <a:effectRef idx="1">
+            <a:schemeClr val="accent1"/>
+          </a:effectRef>
+          <a:fontRef idx="minor">
+            <a:schemeClr val="tx1"/>
+          </a:fontRef>
+        </p:style>
+      </p:cxnSp>
+      <p:sp>
+        <p:nvSpPr>
+          <p:cNvPr id="35" name="TextBox 34">
+            <a:extLst>
+              <a:ext uri="{FF2B5EF4-FFF2-40B4-BE49-F238E27FC236}">
+                <a16:creationId xmlns:a16="http://schemas.microsoft.com/office/drawing/2014/main" id="{3A9E022B-7D34-EC66-3B46-EB1C5CAC4AA2}"/>
+              </a:ext>
+            </a:extLst>
+          </p:cNvPr>
+          <p:cNvSpPr txBox="1"/>
+          <p:nvPr/>
+        </p:nvSpPr>
+        <p:spPr>
+          <a:xfrm>
+            <a:off x="7282790" y="2845172"/>
+            <a:ext cx="1139431" cy="215444"/>
+          </a:xfrm>
+          <a:prstGeom prst="rect">
+            <a:avLst/>
+          </a:prstGeom>
+          <a:noFill/>
+        </p:spPr>
+        <p:txBody>
+          <a:bodyPr wrap="square">
+            <a:spAutoFit/>
+          </a:bodyPr>
+          <a:lstStyle/>
+          <a:p>
+            <a:r>
+              <a:rPr lang="en-US" sz="800" i="0" u="none" strike="noStrike" dirty="0">
+                <a:solidFill>
+                  <a:srgbClr val="000000"/>
+                </a:solidFill>
+                <a:effectLst/>
+                <a:latin typeface="Aptos" panose="020B0004020202020204" pitchFamily="34" charset="0"/>
+              </a:rPr>
+              <a:t>refine constraints</a:t>
+            </a:r>
+            <a:endParaRPr lang="en-US" sz="800" dirty="0">
+              <a:latin typeface="Aptos" panose="020B0004020202020204" pitchFamily="34" charset="0"/>
+            </a:endParaRPr>
+          </a:p>
+        </p:txBody>
+      </p:sp>
+    </p:spTree>
+    <p:extLst>
+      <p:ext uri="{BB962C8B-B14F-4D97-AF65-F5344CB8AC3E}">
+        <p14:creationId xmlns:p14="http://schemas.microsoft.com/office/powerpoint/2010/main" val="2913835367"/>
+      </p:ext>
+    </p:extLst>
+  </p:cSld>
+  <p:clrMapOvr>
+    <a:masterClrMapping/>
+  </p:clrMapOvr>
+</p:sld>
+</file>
+
+<file path=ppt/slides/slide12.xml><?xml version="1.0" encoding="utf-8"?>
 <p:sld xmlns:a="http://schemas.openxmlformats.org/drawingml/2006/main" xmlns:r="http://schemas.openxmlformats.org/officeDocument/2006/relationships" xmlns:p="http://schemas.openxmlformats.org/presentationml/2006/main">
   <p:cSld>
     <p:spTree>
@@ -7255,7 +7047,7 @@
 </p:sld>
 </file>
 
-<file path=ppt/slides/slide12.xml><?xml version="1.0" encoding="utf-8"?>
+<file path=ppt/slides/slide13.xml><?xml version="1.0" encoding="utf-8"?>
 <p:sld xmlns:a="http://schemas.openxmlformats.org/drawingml/2006/main" xmlns:r="http://schemas.openxmlformats.org/officeDocument/2006/relationships" xmlns:p="http://schemas.openxmlformats.org/presentationml/2006/main">
   <p:cSld>
     <p:spTree>
@@ -8574,7 +8366,7 @@
 </p:sld>
 </file>
 
-<file path=ppt/slides/slide13.xml><?xml version="1.0" encoding="utf-8"?>
+<file path=ppt/slides/slide14.xml><?xml version="1.0" encoding="utf-8"?>
 <p:sld xmlns:a="http://schemas.openxmlformats.org/drawingml/2006/main" xmlns:r="http://schemas.openxmlformats.org/officeDocument/2006/relationships" xmlns:p="http://schemas.openxmlformats.org/presentationml/2006/main">
   <p:cSld>
     <p:spTree>
@@ -8820,7 +8612,7 @@
 </p:sld>
 </file>
 
-<file path=ppt/slides/slide14.xml><?xml version="1.0" encoding="utf-8"?>
+<file path=ppt/slides/slide15.xml><?xml version="1.0" encoding="utf-8"?>
 <p:sld xmlns:a="http://schemas.openxmlformats.org/drawingml/2006/main" xmlns:r="http://schemas.openxmlformats.org/officeDocument/2006/relationships" xmlns:p="http://schemas.openxmlformats.org/presentationml/2006/main">
   <p:cSld>
     <p:spTree>

--- a/paper/figures.pptx
+++ b/paper/figures.pptx
@@ -5,7 +5,7 @@
     <p:sldMasterId id="2147483648" r:id="rId1"/>
   </p:sldMasterIdLst>
   <p:notesMasterIdLst>
-    <p:notesMasterId r:id="rId17"/>
+    <p:notesMasterId r:id="rId18"/>
   </p:notesMasterIdLst>
   <p:sldIdLst>
     <p:sldId id="256" r:id="rId2"/>
@@ -19,10 +19,11 @@
     <p:sldId id="264" r:id="rId10"/>
     <p:sldId id="266" r:id="rId11"/>
     <p:sldId id="271" r:id="rId12"/>
-    <p:sldId id="267" r:id="rId13"/>
-    <p:sldId id="269" r:id="rId14"/>
-    <p:sldId id="265" r:id="rId15"/>
-    <p:sldId id="268" r:id="rId16"/>
+    <p:sldId id="272" r:id="rId13"/>
+    <p:sldId id="267" r:id="rId14"/>
+    <p:sldId id="269" r:id="rId15"/>
+    <p:sldId id="265" r:id="rId16"/>
+    <p:sldId id="268" r:id="rId17"/>
   </p:sldIdLst>
   <p:sldSz cx="12192000" cy="6858000"/>
   <p:notesSz cx="6858000" cy="9144000"/>
@@ -132,7 +133,7 @@
 <file path=ppt/revisionInfo.xml><?xml version="1.0" encoding="utf-8"?>
 <p1510:revInfo xmlns:a="http://schemas.openxmlformats.org/drawingml/2006/main" xmlns:r="http://schemas.openxmlformats.org/officeDocument/2006/relationships" xmlns:p1510="http://schemas.microsoft.com/office/powerpoint/2015/10/main">
   <p1510:revLst>
-    <p1510:client id="{77CCF9A6-9404-C14C-B303-F06C2C4D888A}" v="18" dt="2026-05-14T15:56:08.631"/>
+    <p1510:client id="{77CCF9A6-9404-C14C-B303-F06C2C4D888A}" v="7" dt="2026-05-15T16:04:44.401"/>
   </p1510:revLst>
 </p1510:revInfo>
 </file>
@@ -142,7 +143,7 @@
   <pc:docChgLst>
     <pc:chgData name="Kadelka, Claus [MATH]" userId="3587954921_tp_box_2" providerId="OAuth2" clId="{3A5D34D3-13CC-588F-87D8-4157F9E149E9}"/>
     <pc:docChg chg="undo custSel addSld delSld modSld">
-      <pc:chgData name="Kadelka, Claus [MATH]" userId="3587954921_tp_box_2" providerId="OAuth2" clId="{3A5D34D3-13CC-588F-87D8-4157F9E149E9}" dt="2026-05-14T16:02:42.075" v="5262" actId="115"/>
+      <pc:chgData name="Kadelka, Claus [MATH]" userId="3587954921_tp_box_2" providerId="OAuth2" clId="{3A5D34D3-13CC-588F-87D8-4157F9E149E9}" dt="2026-05-15T16:06:16.987" v="5347" actId="478"/>
       <pc:docMkLst>
         <pc:docMk/>
       </pc:docMkLst>
@@ -319,6 +320,117 @@
           </ac:cxnSpMkLst>
         </pc:cxnChg>
       </pc:sldChg>
+      <pc:sldChg chg="addSp delSp modSp new mod">
+        <pc:chgData name="Kadelka, Claus [MATH]" userId="3587954921_tp_box_2" providerId="OAuth2" clId="{3A5D34D3-13CC-588F-87D8-4157F9E149E9}" dt="2026-05-15T16:06:16.987" v="5347" actId="478"/>
+        <pc:sldMkLst>
+          <pc:docMk/>
+          <pc:sldMk cId="804569849" sldId="272"/>
+        </pc:sldMkLst>
+        <pc:spChg chg="del">
+          <ac:chgData name="Kadelka, Claus [MATH]" userId="3587954921_tp_box_2" providerId="OAuth2" clId="{3A5D34D3-13CC-588F-87D8-4157F9E149E9}" dt="2026-05-15T16:00:57.530" v="5264" actId="478"/>
+          <ac:spMkLst>
+            <pc:docMk/>
+            <pc:sldMk cId="804569849" sldId="272"/>
+            <ac:spMk id="2" creationId="{7CDA06DF-CBEF-B4F8-A12D-1E5AE6F35AB7}"/>
+          </ac:spMkLst>
+        </pc:spChg>
+        <pc:spChg chg="del">
+          <ac:chgData name="Kadelka, Claus [MATH]" userId="3587954921_tp_box_2" providerId="OAuth2" clId="{3A5D34D3-13CC-588F-87D8-4157F9E149E9}" dt="2026-05-15T16:00:57.530" v="5264" actId="478"/>
+          <ac:spMkLst>
+            <pc:docMk/>
+            <pc:sldMk cId="804569849" sldId="272"/>
+            <ac:spMk id="3" creationId="{4B374062-2BCC-E057-DAF3-A5CE8DD207D9}"/>
+          </ac:spMkLst>
+        </pc:spChg>
+        <pc:spChg chg="add mod">
+          <ac:chgData name="Kadelka, Claus [MATH]" userId="3587954921_tp_box_2" providerId="OAuth2" clId="{3A5D34D3-13CC-588F-87D8-4157F9E149E9}" dt="2026-05-15T16:01:15.003" v="5269" actId="2085"/>
+          <ac:spMkLst>
+            <pc:docMk/>
+            <pc:sldMk cId="804569849" sldId="272"/>
+            <ac:spMk id="6" creationId="{8EC4F81C-E0FA-D9DB-3359-6530B4E5EF7B}"/>
+          </ac:spMkLst>
+        </pc:spChg>
+        <pc:spChg chg="add mod">
+          <ac:chgData name="Kadelka, Claus [MATH]" userId="3587954921_tp_box_2" providerId="OAuth2" clId="{3A5D34D3-13CC-588F-87D8-4157F9E149E9}" dt="2026-05-15T16:01:18.157" v="5271" actId="1076"/>
+          <ac:spMkLst>
+            <pc:docMk/>
+            <pc:sldMk cId="804569849" sldId="272"/>
+            <ac:spMk id="7" creationId="{2BC45785-160F-0C54-C627-6B9882E9A523}"/>
+          </ac:spMkLst>
+        </pc:spChg>
+        <pc:spChg chg="add mod">
+          <ac:chgData name="Kadelka, Claus [MATH]" userId="3587954921_tp_box_2" providerId="OAuth2" clId="{3A5D34D3-13CC-588F-87D8-4157F9E149E9}" dt="2026-05-15T16:02:04.542" v="5284" actId="255"/>
+          <ac:spMkLst>
+            <pc:docMk/>
+            <pc:sldMk cId="804569849" sldId="272"/>
+            <ac:spMk id="8" creationId="{E6B2BB3E-EF70-C1CB-4761-43E99493E6F2}"/>
+          </ac:spMkLst>
+        </pc:spChg>
+        <pc:spChg chg="add mod">
+          <ac:chgData name="Kadelka, Claus [MATH]" userId="3587954921_tp_box_2" providerId="OAuth2" clId="{3A5D34D3-13CC-588F-87D8-4157F9E149E9}" dt="2026-05-15T16:02:14.930" v="5293" actId="20577"/>
+          <ac:spMkLst>
+            <pc:docMk/>
+            <pc:sldMk cId="804569849" sldId="272"/>
+            <ac:spMk id="9" creationId="{21F99191-2920-CA24-0B07-E479DC7B8B5E}"/>
+          </ac:spMkLst>
+        </pc:spChg>
+        <pc:spChg chg="add mod">
+          <ac:chgData name="Kadelka, Claus [MATH]" userId="3587954921_tp_box_2" providerId="OAuth2" clId="{3A5D34D3-13CC-588F-87D8-4157F9E149E9}" dt="2026-05-15T16:02:34.270" v="5299" actId="1076"/>
+          <ac:spMkLst>
+            <pc:docMk/>
+            <pc:sldMk cId="804569849" sldId="272"/>
+            <ac:spMk id="10" creationId="{6B8B6525-19F8-6D67-11F9-17BF954D0C89}"/>
+          </ac:spMkLst>
+        </pc:spChg>
+        <pc:spChg chg="add mod">
+          <ac:chgData name="Kadelka, Claus [MATH]" userId="3587954921_tp_box_2" providerId="OAuth2" clId="{3A5D34D3-13CC-588F-87D8-4157F9E149E9}" dt="2026-05-15T16:04:02.374" v="5329" actId="1035"/>
+          <ac:spMkLst>
+            <pc:docMk/>
+            <pc:sldMk cId="804569849" sldId="272"/>
+            <ac:spMk id="11" creationId="{E36596A4-FA80-E96E-CC1C-1E53B5F0EC25}"/>
+          </ac:spMkLst>
+        </pc:spChg>
+        <pc:spChg chg="add mod">
+          <ac:chgData name="Kadelka, Claus [MATH]" userId="3587954921_tp_box_2" providerId="OAuth2" clId="{3A5D34D3-13CC-588F-87D8-4157F9E149E9}" dt="2026-05-15T16:03:58.660" v="5324" actId="1038"/>
+          <ac:spMkLst>
+            <pc:docMk/>
+            <pc:sldMk cId="804569849" sldId="272"/>
+            <ac:spMk id="12" creationId="{567D6CF0-CA07-F0DD-89EA-7627D4B53499}"/>
+          </ac:spMkLst>
+        </pc:spChg>
+        <pc:spChg chg="add mod">
+          <ac:chgData name="Kadelka, Claus [MATH]" userId="3587954921_tp_box_2" providerId="OAuth2" clId="{3A5D34D3-13CC-588F-87D8-4157F9E149E9}" dt="2026-05-15T16:03:30.453" v="5321" actId="20577"/>
+          <ac:spMkLst>
+            <pc:docMk/>
+            <pc:sldMk cId="804569849" sldId="272"/>
+            <ac:spMk id="13" creationId="{EBA34549-F073-D6B9-B2B5-0A0E95FF6600}"/>
+          </ac:spMkLst>
+        </pc:spChg>
+        <pc:spChg chg="add del mod">
+          <ac:chgData name="Kadelka, Claus [MATH]" userId="3587954921_tp_box_2" providerId="OAuth2" clId="{3A5D34D3-13CC-588F-87D8-4157F9E149E9}" dt="2026-05-15T16:05:32.688" v="5344" actId="478"/>
+          <ac:spMkLst>
+            <pc:docMk/>
+            <pc:sldMk cId="804569849" sldId="272"/>
+            <ac:spMk id="14" creationId="{FA4741D8-0DD4-748C-3B15-2731B5293C1D}"/>
+          </ac:spMkLst>
+        </pc:spChg>
+        <pc:spChg chg="add del mod">
+          <ac:chgData name="Kadelka, Claus [MATH]" userId="3587954921_tp_box_2" providerId="OAuth2" clId="{3A5D34D3-13CC-588F-87D8-4157F9E149E9}" dt="2026-05-15T16:06:16.987" v="5347" actId="478"/>
+          <ac:spMkLst>
+            <pc:docMk/>
+            <pc:sldMk cId="804569849" sldId="272"/>
+            <ac:spMk id="15" creationId="{63D537EF-0C78-40AE-1270-52A745797B8E}"/>
+          </ac:spMkLst>
+        </pc:spChg>
+        <pc:picChg chg="add mod">
+          <ac:chgData name="Kadelka, Claus [MATH]" userId="3587954921_tp_box_2" providerId="OAuth2" clId="{3A5D34D3-13CC-588F-87D8-4157F9E149E9}" dt="2026-05-15T16:01:03.561" v="5266"/>
+          <ac:picMkLst>
+            <pc:docMk/>
+            <pc:sldMk cId="804569849" sldId="272"/>
+            <ac:picMk id="5" creationId="{ADC8FC64-7A86-8421-8D04-C45D1C9CCFB8}"/>
+          </ac:picMkLst>
+        </pc:picChg>
+      </pc:sldChg>
     </pc:docChg>
   </pc:docChgLst>
 </pc:chgInfo>
@@ -912,7 +1024,7 @@
           <a:p>
             <a:fld id="{C1B1E1C5-D11A-164E-ACBF-BFC252B2970F}" type="slidenum">
               <a:rPr lang="en-US" smtClean="0"/>
-              <a:t>12</a:t>
+              <a:t>13</a:t>
             </a:fld>
             <a:endParaRPr lang="en-US"/>
           </a:p>
@@ -1020,7 +1132,7 @@
           <a:p>
             <a:fld id="{C1B1E1C5-D11A-164E-ACBF-BFC252B2970F}" type="slidenum">
               <a:rPr lang="en-US" smtClean="0"/>
-              <a:t>13</a:t>
+              <a:t>14</a:t>
             </a:fld>
             <a:endParaRPr lang="en-US"/>
           </a:p>
@@ -5993,6 +6105,479 @@
 </file>
 
 <file path=ppt/slides/slide12.xml><?xml version="1.0" encoding="utf-8"?>
+<p:sld xmlns:a="http://schemas.openxmlformats.org/drawingml/2006/main" xmlns:r="http://schemas.openxmlformats.org/officeDocument/2006/relationships" xmlns:p="http://schemas.openxmlformats.org/presentationml/2006/main">
+  <p:cSld>
+    <p:spTree>
+      <p:nvGrpSpPr>
+        <p:cNvPr id="1" name=""/>
+        <p:cNvGrpSpPr/>
+        <p:nvPr/>
+      </p:nvGrpSpPr>
+      <p:grpSpPr>
+        <a:xfrm>
+          <a:off x="0" y="0"/>
+          <a:ext cx="0" cy="0"/>
+          <a:chOff x="0" y="0"/>
+          <a:chExt cx="0" cy="0"/>
+        </a:xfrm>
+      </p:grpSpPr>
+      <p:pic>
+        <p:nvPicPr>
+          <p:cNvPr id="5" name="Picture 4">
+            <a:extLst>
+              <a:ext uri="{FF2B5EF4-FFF2-40B4-BE49-F238E27FC236}">
+                <a16:creationId xmlns:a16="http://schemas.microsoft.com/office/drawing/2014/main" id="{ADC8FC64-7A86-8421-8D04-C45D1C9CCFB8}"/>
+              </a:ext>
+            </a:extLst>
+          </p:cNvPr>
+          <p:cNvPicPr>
+            <a:picLocks noChangeAspect="1"/>
+          </p:cNvPicPr>
+          <p:nvPr/>
+        </p:nvPicPr>
+        <p:blipFill>
+          <a:blip r:embed="rId2"/>
+          <a:stretch>
+            <a:fillRect/>
+          </a:stretch>
+        </p:blipFill>
+        <p:spPr>
+          <a:xfrm>
+            <a:off x="4419600" y="1625600"/>
+            <a:ext cx="3352800" cy="3606800"/>
+          </a:xfrm>
+          <a:prstGeom prst="rect">
+            <a:avLst/>
+          </a:prstGeom>
+        </p:spPr>
+      </p:pic>
+      <p:sp>
+        <p:nvSpPr>
+          <p:cNvPr id="6" name="Rectangle 5">
+            <a:extLst>
+              <a:ext uri="{FF2B5EF4-FFF2-40B4-BE49-F238E27FC236}">
+                <a16:creationId xmlns:a16="http://schemas.microsoft.com/office/drawing/2014/main" id="{8EC4F81C-E0FA-D9DB-3359-6530B4E5EF7B}"/>
+              </a:ext>
+            </a:extLst>
+          </p:cNvPr>
+          <p:cNvSpPr/>
+          <p:nvPr/>
+        </p:nvSpPr>
+        <p:spPr>
+          <a:xfrm>
+            <a:off x="3712464" y="1325880"/>
+            <a:ext cx="1719072" cy="640080"/>
+          </a:xfrm>
+          <a:prstGeom prst="rect">
+            <a:avLst/>
+          </a:prstGeom>
+          <a:solidFill>
+            <a:schemeClr val="bg1"/>
+          </a:solidFill>
+          <a:ln>
+            <a:noFill/>
+          </a:ln>
+        </p:spPr>
+        <p:style>
+          <a:lnRef idx="2">
+            <a:schemeClr val="accent1">
+              <a:shade val="15000"/>
+            </a:schemeClr>
+          </a:lnRef>
+          <a:fillRef idx="1">
+            <a:schemeClr val="accent1"/>
+          </a:fillRef>
+          <a:effectRef idx="0">
+            <a:schemeClr val="accent1"/>
+          </a:effectRef>
+          <a:fontRef idx="minor">
+            <a:schemeClr val="lt1"/>
+          </a:fontRef>
+        </p:style>
+        <p:txBody>
+          <a:bodyPr rtlCol="0" anchor="ctr"/>
+          <a:lstStyle/>
+          <a:p>
+            <a:pPr algn="ctr"/>
+            <a:endParaRPr lang="en-US"/>
+          </a:p>
+        </p:txBody>
+      </p:sp>
+      <p:sp>
+        <p:nvSpPr>
+          <p:cNvPr id="7" name="Rectangle 6">
+            <a:extLst>
+              <a:ext uri="{FF2B5EF4-FFF2-40B4-BE49-F238E27FC236}">
+                <a16:creationId xmlns:a16="http://schemas.microsoft.com/office/drawing/2014/main" id="{2BC45785-160F-0C54-C627-6B9882E9A523}"/>
+              </a:ext>
+            </a:extLst>
+          </p:cNvPr>
+          <p:cNvSpPr/>
+          <p:nvPr/>
+        </p:nvSpPr>
+        <p:spPr>
+          <a:xfrm>
+            <a:off x="5431536" y="1155700"/>
+            <a:ext cx="1719072" cy="640080"/>
+          </a:xfrm>
+          <a:prstGeom prst="rect">
+            <a:avLst/>
+          </a:prstGeom>
+          <a:solidFill>
+            <a:schemeClr val="bg1"/>
+          </a:solidFill>
+          <a:ln>
+            <a:noFill/>
+          </a:ln>
+        </p:spPr>
+        <p:style>
+          <a:lnRef idx="2">
+            <a:schemeClr val="accent1">
+              <a:shade val="15000"/>
+            </a:schemeClr>
+          </a:lnRef>
+          <a:fillRef idx="1">
+            <a:schemeClr val="accent1"/>
+          </a:fillRef>
+          <a:effectRef idx="0">
+            <a:schemeClr val="accent1"/>
+          </a:effectRef>
+          <a:fontRef idx="minor">
+            <a:schemeClr val="lt1"/>
+          </a:fontRef>
+        </p:style>
+        <p:txBody>
+          <a:bodyPr rtlCol="0" anchor="ctr"/>
+          <a:lstStyle/>
+          <a:p>
+            <a:pPr algn="ctr"/>
+            <a:endParaRPr lang="en-US"/>
+          </a:p>
+        </p:txBody>
+      </p:sp>
+      <p:sp>
+        <p:nvSpPr>
+          <p:cNvPr id="8" name="Rectangle 7">
+            <a:extLst>
+              <a:ext uri="{FF2B5EF4-FFF2-40B4-BE49-F238E27FC236}">
+                <a16:creationId xmlns:a16="http://schemas.microsoft.com/office/drawing/2014/main" id="{E6B2BB3E-EF70-C1CB-4761-43E99493E6F2}"/>
+              </a:ext>
+            </a:extLst>
+          </p:cNvPr>
+          <p:cNvSpPr/>
+          <p:nvPr/>
+        </p:nvSpPr>
+        <p:spPr>
+          <a:xfrm>
+            <a:off x="3886200" y="2715768"/>
+            <a:ext cx="3794760" cy="310896"/>
+          </a:xfrm>
+          <a:prstGeom prst="rect">
+            <a:avLst/>
+          </a:prstGeom>
+          <a:solidFill>
+            <a:srgbClr val="C00000">
+              <a:alpha val="29804"/>
+            </a:srgbClr>
+          </a:solidFill>
+          <a:ln>
+            <a:noFill/>
+          </a:ln>
+        </p:spPr>
+        <p:style>
+          <a:lnRef idx="2">
+            <a:schemeClr val="accent1">
+              <a:shade val="15000"/>
+            </a:schemeClr>
+          </a:lnRef>
+          <a:fillRef idx="1">
+            <a:schemeClr val="accent1"/>
+          </a:fillRef>
+          <a:effectRef idx="0">
+            <a:schemeClr val="accent1"/>
+          </a:effectRef>
+          <a:fontRef idx="minor">
+            <a:schemeClr val="lt1"/>
+          </a:fontRef>
+        </p:style>
+        <p:txBody>
+          <a:bodyPr rtlCol="0" anchor="ctr"/>
+          <a:lstStyle/>
+          <a:p>
+            <a:r>
+              <a:rPr lang="en-US" sz="1200" dirty="0">
+                <a:solidFill>
+                  <a:schemeClr val="tx1"/>
+                </a:solidFill>
+              </a:rPr>
+              <a:t>m=2</a:t>
+            </a:r>
+          </a:p>
+        </p:txBody>
+      </p:sp>
+      <p:sp>
+        <p:nvSpPr>
+          <p:cNvPr id="9" name="Rectangle 8">
+            <a:extLst>
+              <a:ext uri="{FF2B5EF4-FFF2-40B4-BE49-F238E27FC236}">
+                <a16:creationId xmlns:a16="http://schemas.microsoft.com/office/drawing/2014/main" id="{21F99191-2920-CA24-0B07-E479DC7B8B5E}"/>
+              </a:ext>
+            </a:extLst>
+          </p:cNvPr>
+          <p:cNvSpPr/>
+          <p:nvPr/>
+        </p:nvSpPr>
+        <p:spPr>
+          <a:xfrm>
+            <a:off x="3886200" y="3703321"/>
+            <a:ext cx="3794760" cy="310896"/>
+          </a:xfrm>
+          <a:prstGeom prst="rect">
+            <a:avLst/>
+          </a:prstGeom>
+          <a:solidFill>
+            <a:srgbClr val="C00000">
+              <a:alpha val="29804"/>
+            </a:srgbClr>
+          </a:solidFill>
+          <a:ln>
+            <a:noFill/>
+          </a:ln>
+        </p:spPr>
+        <p:style>
+          <a:lnRef idx="2">
+            <a:schemeClr val="accent1">
+              <a:shade val="15000"/>
+            </a:schemeClr>
+          </a:lnRef>
+          <a:fillRef idx="1">
+            <a:schemeClr val="accent1"/>
+          </a:fillRef>
+          <a:effectRef idx="0">
+            <a:schemeClr val="accent1"/>
+          </a:effectRef>
+          <a:fontRef idx="minor">
+            <a:schemeClr val="lt1"/>
+          </a:fontRef>
+        </p:style>
+        <p:txBody>
+          <a:bodyPr rtlCol="0" anchor="ctr"/>
+          <a:lstStyle/>
+          <a:p>
+            <a:r>
+              <a:rPr lang="en-US" sz="1200" dirty="0">
+                <a:solidFill>
+                  <a:schemeClr val="tx1"/>
+                </a:solidFill>
+              </a:rPr>
+              <a:t>m=1</a:t>
+            </a:r>
+          </a:p>
+        </p:txBody>
+      </p:sp>
+      <p:sp>
+        <p:nvSpPr>
+          <p:cNvPr id="10" name="Rectangle 9">
+            <a:extLst>
+              <a:ext uri="{FF2B5EF4-FFF2-40B4-BE49-F238E27FC236}">
+                <a16:creationId xmlns:a16="http://schemas.microsoft.com/office/drawing/2014/main" id="{6B8B6525-19F8-6D67-11F9-17BF954D0C89}"/>
+              </a:ext>
+            </a:extLst>
+          </p:cNvPr>
+          <p:cNvSpPr/>
+          <p:nvPr/>
+        </p:nvSpPr>
+        <p:spPr>
+          <a:xfrm>
+            <a:off x="3886200" y="1762760"/>
+            <a:ext cx="3794760" cy="310896"/>
+          </a:xfrm>
+          <a:prstGeom prst="rect">
+            <a:avLst/>
+          </a:prstGeom>
+          <a:solidFill>
+            <a:srgbClr val="C00000">
+              <a:alpha val="29804"/>
+            </a:srgbClr>
+          </a:solidFill>
+          <a:ln>
+            <a:noFill/>
+          </a:ln>
+        </p:spPr>
+        <p:style>
+          <a:lnRef idx="2">
+            <a:schemeClr val="accent1">
+              <a:shade val="15000"/>
+            </a:schemeClr>
+          </a:lnRef>
+          <a:fillRef idx="1">
+            <a:schemeClr val="accent1"/>
+          </a:fillRef>
+          <a:effectRef idx="0">
+            <a:schemeClr val="accent1"/>
+          </a:effectRef>
+          <a:fontRef idx="minor">
+            <a:schemeClr val="lt1"/>
+          </a:fontRef>
+        </p:style>
+        <p:txBody>
+          <a:bodyPr rtlCol="0" anchor="ctr"/>
+          <a:lstStyle/>
+          <a:p>
+            <a:r>
+              <a:rPr lang="en-US" sz="1200" dirty="0">
+                <a:solidFill>
+                  <a:schemeClr val="tx1"/>
+                </a:solidFill>
+              </a:rPr>
+              <a:t>m=3</a:t>
+            </a:r>
+          </a:p>
+        </p:txBody>
+      </p:sp>
+      <p:sp>
+        <p:nvSpPr>
+          <p:cNvPr id="11" name="TextBox 10">
+            <a:extLst>
+              <a:ext uri="{FF2B5EF4-FFF2-40B4-BE49-F238E27FC236}">
+                <a16:creationId xmlns:a16="http://schemas.microsoft.com/office/drawing/2014/main" id="{E36596A4-FA80-E96E-CC1C-1E53B5F0EC25}"/>
+              </a:ext>
+            </a:extLst>
+          </p:cNvPr>
+          <p:cNvSpPr txBox="1"/>
+          <p:nvPr/>
+        </p:nvSpPr>
+        <p:spPr>
+          <a:xfrm>
+            <a:off x="5623268" y="2559848"/>
+            <a:ext cx="463588" cy="307777"/>
+          </a:xfrm>
+          <a:prstGeom prst="rect">
+            <a:avLst/>
+          </a:prstGeom>
+          <a:solidFill>
+            <a:schemeClr val="tx2">
+              <a:lumMod val="25000"/>
+              <a:lumOff val="75000"/>
+            </a:schemeClr>
+          </a:solidFill>
+          <a:ln>
+            <a:noFill/>
+          </a:ln>
+        </p:spPr>
+        <p:txBody>
+          <a:bodyPr wrap="none" rtlCol="0">
+            <a:spAutoFit/>
+          </a:bodyPr>
+          <a:lstStyle/>
+          <a:p>
+            <a:r>
+              <a:rPr lang="en-US" sz="1400" dirty="0"/>
+              <a:t>s=2</a:t>
+            </a:r>
+          </a:p>
+        </p:txBody>
+      </p:sp>
+      <p:sp>
+        <p:nvSpPr>
+          <p:cNvPr id="12" name="TextBox 11">
+            <a:extLst>
+              <a:ext uri="{FF2B5EF4-FFF2-40B4-BE49-F238E27FC236}">
+                <a16:creationId xmlns:a16="http://schemas.microsoft.com/office/drawing/2014/main" id="{567D6CF0-CA07-F0DD-89EA-7627D4B53499}"/>
+              </a:ext>
+            </a:extLst>
+          </p:cNvPr>
+          <p:cNvSpPr txBox="1"/>
+          <p:nvPr/>
+        </p:nvSpPr>
+        <p:spPr>
+          <a:xfrm>
+            <a:off x="7147560" y="2554259"/>
+            <a:ext cx="463588" cy="307777"/>
+          </a:xfrm>
+          <a:prstGeom prst="rect">
+            <a:avLst/>
+          </a:prstGeom>
+          <a:solidFill>
+            <a:schemeClr val="tx2">
+              <a:lumMod val="25000"/>
+              <a:lumOff val="75000"/>
+            </a:schemeClr>
+          </a:solidFill>
+          <a:ln>
+            <a:noFill/>
+          </a:ln>
+        </p:spPr>
+        <p:txBody>
+          <a:bodyPr wrap="none" rtlCol="0">
+            <a:spAutoFit/>
+          </a:bodyPr>
+          <a:lstStyle/>
+          <a:p>
+            <a:r>
+              <a:rPr lang="en-US" sz="1400" dirty="0"/>
+              <a:t>s=1</a:t>
+            </a:r>
+          </a:p>
+        </p:txBody>
+      </p:sp>
+      <p:sp>
+        <p:nvSpPr>
+          <p:cNvPr id="13" name="TextBox 12">
+            <a:extLst>
+              <a:ext uri="{FF2B5EF4-FFF2-40B4-BE49-F238E27FC236}">
+                <a16:creationId xmlns:a16="http://schemas.microsoft.com/office/drawing/2014/main" id="{EBA34549-F073-D6B9-B2B5-0A0E95FF6600}"/>
+              </a:ext>
+            </a:extLst>
+          </p:cNvPr>
+          <p:cNvSpPr txBox="1"/>
+          <p:nvPr/>
+        </p:nvSpPr>
+        <p:spPr>
+          <a:xfrm>
+            <a:off x="5126444" y="3525083"/>
+            <a:ext cx="463588" cy="307777"/>
+          </a:xfrm>
+          <a:prstGeom prst="rect">
+            <a:avLst/>
+          </a:prstGeom>
+          <a:solidFill>
+            <a:schemeClr val="tx2">
+              <a:lumMod val="25000"/>
+              <a:lumOff val="75000"/>
+            </a:schemeClr>
+          </a:solidFill>
+          <a:ln>
+            <a:noFill/>
+          </a:ln>
+        </p:spPr>
+        <p:txBody>
+          <a:bodyPr wrap="none" rtlCol="0">
+            <a:spAutoFit/>
+          </a:bodyPr>
+          <a:lstStyle/>
+          <a:p>
+            <a:r>
+              <a:rPr lang="en-US" sz="1400" dirty="0"/>
+              <a:t>s=3</a:t>
+            </a:r>
+          </a:p>
+        </p:txBody>
+      </p:sp>
+    </p:spTree>
+    <p:extLst>
+      <p:ext uri="{BB962C8B-B14F-4D97-AF65-F5344CB8AC3E}">
+        <p14:creationId xmlns:p14="http://schemas.microsoft.com/office/powerpoint/2010/main" val="804569849"/>
+      </p:ext>
+    </p:extLst>
+  </p:cSld>
+  <p:clrMapOvr>
+    <a:masterClrMapping/>
+  </p:clrMapOvr>
+</p:sld>
+</file>
+
+<file path=ppt/slides/slide13.xml><?xml version="1.0" encoding="utf-8"?>
 <p:sld xmlns:a="http://schemas.openxmlformats.org/drawingml/2006/main" xmlns:r="http://schemas.openxmlformats.org/officeDocument/2006/relationships" xmlns:p="http://schemas.openxmlformats.org/presentationml/2006/main">
   <p:cSld>
     <p:spTree>
@@ -7047,7 +7632,7 @@
 </p:sld>
 </file>
 
-<file path=ppt/slides/slide13.xml><?xml version="1.0" encoding="utf-8"?>
+<file path=ppt/slides/slide14.xml><?xml version="1.0" encoding="utf-8"?>
 <p:sld xmlns:a="http://schemas.openxmlformats.org/drawingml/2006/main" xmlns:r="http://schemas.openxmlformats.org/officeDocument/2006/relationships" xmlns:p="http://schemas.openxmlformats.org/presentationml/2006/main">
   <p:cSld>
     <p:spTree>
@@ -8366,7 +8951,7 @@
 </p:sld>
 </file>
 
-<file path=ppt/slides/slide14.xml><?xml version="1.0" encoding="utf-8"?>
+<file path=ppt/slides/slide15.xml><?xml version="1.0" encoding="utf-8"?>
 <p:sld xmlns:a="http://schemas.openxmlformats.org/drawingml/2006/main" xmlns:r="http://schemas.openxmlformats.org/officeDocument/2006/relationships" xmlns:p="http://schemas.openxmlformats.org/presentationml/2006/main">
   <p:cSld>
     <p:spTree>
@@ -8612,7 +9197,7 @@
 </p:sld>
 </file>
 
-<file path=ppt/slides/slide15.xml><?xml version="1.0" encoding="utf-8"?>
+<file path=ppt/slides/slide16.xml><?xml version="1.0" encoding="utf-8"?>
 <p:sld xmlns:a="http://schemas.openxmlformats.org/drawingml/2006/main" xmlns:r="http://schemas.openxmlformats.org/officeDocument/2006/relationships" xmlns:p="http://schemas.openxmlformats.org/presentationml/2006/main">
   <p:cSld>
     <p:spTree>
